--- a/Final_Revision/Exam_Practice/FR-L04_Speaking_Workshop_Education_Work_and_the_International_World.pptx
+++ b/Final_Revision/Exam_Practice/FR-L04_Speaking_Workshop_Education_Work_and_the_International_World.pptx
@@ -615,7 +615,11 @@
           <a:lstStyle/>
           <a:p>
             <a:r>
-              <a:rPr lang="en-US" dirty="0"/>
+              <a:rPr lang="ar-SA" dirty="0">
+                <a:latin typeface="Amiri" pitchFamily="2" charset="-78"/>
+                <a:ea typeface="Amiri" pitchFamily="2" charset="-78"/>
+                <a:cs typeface="Amiri" pitchFamily="2" charset="-78"/>
+              </a:rPr>
               <a:t>ROLE PLAY C (Develop) — an exchange in Jordan.
 SET-UP IN THE BREAKOUT ROOM: A = examiner (reads the left column ONLY — the questions, in order), B = candidate (sees the task column; Core may use the help column), C = observer (ticks the feedback checklist). 1 minute preparation, about 3 minutes speaking, 1 minute feedback, then rotate.
 Task ! is the unexpected question: in the exam the candidate has not seen it — the examiner should read it without warning.
@@ -707,7 +711,11 @@
           <a:lstStyle/>
           <a:p>
             <a:r>
-              <a:rPr lang="en-US" dirty="0"/>
+              <a:rPr lang="ar-SA" dirty="0">
+                <a:latin typeface="Amiri" pitchFamily="2" charset="-78"/>
+                <a:ea typeface="Amiri" pitchFamily="2" charset="-78"/>
+                <a:cs typeface="Amiri" pitchFamily="2" charset="-78"/>
+              </a:rPr>
               <a:t>ROLE PLAY D (Stretch) — a youth panel.
 SET-UP IN THE BREAKOUT ROOM: A = examiner (reads the left column ONLY — the questions, in order), B = candidate (sees the task column; Core may use the help column), C = observer (ticks the feedback checklist). 1 minute preparation, about 3 minutes speaking, 1 minute feedback, then rotate.
 Task ! is the unexpected question: in the exam the candidate has not seen it — the examiner should read it without warning.
@@ -1243,7 +1251,11 @@
           <a:lstStyle/>
           <a:p>
             <a:r>
-              <a:rPr lang="en-US" dirty="0"/>
+              <a:rPr lang="ar-SA" dirty="0">
+                <a:latin typeface="Amiri" pitchFamily="2" charset="-78"/>
+                <a:ea typeface="Amiri" pitchFamily="2" charset="-78"/>
+                <a:cs typeface="Amiri" pitchFamily="2" charset="-78"/>
+              </a:rPr>
               <a:t>TOPIC CONVERSATION — Core. Examiner asks the questions in order and may add “لِمَاذَا؟ / هَلْ يُمْكِنُ أَنْ تَشْرَحَ أَكْثَرَ؟” to push for more. Candidate aims for one full sentence per question.
 </a:t>
             </a:r>
@@ -1332,7 +1344,11 @@
           <a:lstStyle/>
           <a:p>
             <a:r>
-              <a:rPr lang="en-US" dirty="0"/>
+              <a:rPr lang="ar-SA" dirty="0">
+                <a:latin typeface="Amiri" pitchFamily="2" charset="-78"/>
+                <a:ea typeface="Amiri" pitchFamily="2" charset="-78"/>
+                <a:cs typeface="Amiri" pitchFamily="2" charset="-78"/>
+              </a:rPr>
               <a:t>TOPIC CONVERSATION — Develop. Examiner asks the questions in order and may add “لِمَاذَا؟ / هَلْ يُمْكِنُ أَنْ تَشْرَحَ أَكْثَرَ؟” to push for more. Candidate aims for two or three sentences, with linkers and two time frames.
 </a:t>
             </a:r>
@@ -1421,7 +1437,11 @@
           <a:lstStyle/>
           <a:p>
             <a:r>
-              <a:rPr lang="en-US" dirty="0"/>
+              <a:rPr lang="ar-SA" dirty="0">
+                <a:latin typeface="Amiri" pitchFamily="2" charset="-78"/>
+                <a:ea typeface="Amiri" pitchFamily="2" charset="-78"/>
+                <a:cs typeface="Amiri" pitchFamily="2" charset="-78"/>
+              </a:rPr>
               <a:t>TOPIC CONVERSATION — Stretch. Examiner asks the questions in order and may add “لِمَاذَا؟ / هَلْ يُمْكِنُ أَنْ تَشْرَحَ أَكْثَرَ؟” to push for more. Candidate aims for a developed answer: opinion, balance, concession and a conditional.
 </a:t>
             </a:r>
@@ -1510,7 +1530,11 @@
           <a:lstStyle/>
           <a:p>
             <a:r>
-              <a:rPr lang="en-US" dirty="0"/>
+              <a:rPr lang="ar-SA" dirty="0">
+                <a:latin typeface="Amiri" pitchFamily="2" charset="-78"/>
+                <a:ea typeface="Amiri" pitchFamily="2" charset="-78"/>
+                <a:cs typeface="Amiri" pitchFamily="2" charset="-78"/>
+              </a:rPr>
               <a:t>WELCOME (1 min) — while students join.
 • Greet each student by name as they arrive: السَّلَامُ عَلَيْكُمْ. Take the register (Pastoral Tracker: attendance 0/1).
 • 2-MINUTE CHECK-IN (SEND training): a private chat to any student who seemed unsettled last lesson — “Are you okay today? 👍 / 👎”.
@@ -2224,7 +2248,11 @@
           <a:lstStyle/>
           <a:p>
             <a:r>
-              <a:rPr lang="en-US" dirty="0"/>
+              <a:rPr lang="ar-SA" dirty="0">
+                <a:latin typeface="Amiri" pitchFamily="2" charset="-78"/>
+                <a:ea typeface="Amiri" pitchFamily="2" charset="-78"/>
+                <a:cs typeface="Amiri" pitchFamily="2" charset="-78"/>
+              </a:rPr>
               <a:t>TEACH (3 min). Role play = precise and complete; conversation = develop. Choral repetition of the repair phrases. To a girl: تُعِيدِي.</a:t>
             </a:r>
             <a:endParaRPr lang="en-US" dirty="0"/>
@@ -2312,7 +2340,11 @@
           <a:lstStyle/>
           <a:p>
             <a:r>
-              <a:rPr lang="en-US" dirty="0"/>
+              <a:rPr lang="ar-SA" dirty="0">
+                <a:latin typeface="Amiri" pitchFamily="2" charset="-78"/>
+                <a:ea typeface="Amiri" pitchFamily="2" charset="-78"/>
+                <a:cs typeface="Amiri" pitchFamily="2" charset="-78"/>
+              </a:rPr>
               <a:t>LANGUAGE BANK (2 min) — a revision map of Topics D and E. EXAM TIP: professions change for gender (مُهَنْدِسٌ / مُهَنْدِسَةٌ), and languages are feminine (اللُّغَةُ العَرَبِيَّةُ) — two quick accuracy wins.</a:t>
             </a:r>
             <a:endParaRPr lang="en-US" dirty="0"/>
@@ -2400,7 +2432,11 @@
           <a:lstStyle/>
           <a:p>
             <a:r>
-              <a:rPr lang="en-US" dirty="0"/>
+              <a:rPr lang="ar-SA" dirty="0">
+                <a:latin typeface="Amiri" pitchFamily="2" charset="-78"/>
+                <a:ea typeface="Amiri" pitchFamily="2" charset="-78"/>
+                <a:cs typeface="Amiri" pitchFamily="2" charset="-78"/>
+              </a:rPr>
               <a:t>LANGUAGE BANK (2 min) — interviews need formal Arabic: يَسُرُّنِي أَنْ · أَوَدُّ أَنْ · حَضْرَتُكَ. Comparing cultures needs respect: بَيْنَمَا · غَالِبًا · مُخْتَلِفٌ لَا أَفْضَلُ. EXAM TIP: end a developed answer with a plan: إِذَا … فَسَـ…</a:t>
             </a:r>
             <a:endParaRPr lang="en-US" dirty="0"/>
@@ -2576,7 +2612,11 @@
           <a:lstStyle/>
           <a:p>
             <a:r>
-              <a:rPr lang="en-US" dirty="0"/>
+              <a:rPr lang="ar-SA" dirty="0">
+                <a:latin typeface="Amiri" pitchFamily="2" charset="-78"/>
+                <a:ea typeface="Amiri" pitchFamily="2" charset="-78"/>
+                <a:cs typeface="Amiri" pitchFamily="2" charset="-78"/>
+              </a:rPr>
               <a:t>ROLE PLAY A (Core) — a careers interview.
 SET-UP IN THE BREAKOUT ROOM: A = examiner (reads the left column ONLY — the questions, in order), B = candidate (sees the task column; Core may use the help column), C = observer (ticks the feedback checklist). 1 minute preparation, about 3 minutes speaking, 1 minute feedback, then rotate.
 Task ! is the unexpected question: in the exam the candidate has not seen it — the examiner should read it without warning.
@@ -2668,7 +2708,11 @@
           <a:lstStyle/>
           <a:p>
             <a:r>
-              <a:rPr lang="en-US" dirty="0"/>
+              <a:rPr lang="ar-SA" dirty="0">
+                <a:latin typeface="Amiri" pitchFamily="2" charset="-78"/>
+                <a:ea typeface="Amiri" pitchFamily="2" charset="-78"/>
+                <a:cs typeface="Amiri" pitchFamily="2" charset="-78"/>
+              </a:rPr>
               <a:t>ROLE PLAY B (Core+) — a job interview.
 SET-UP IN THE BREAKOUT ROOM: A = examiner (reads the left column ONLY — the questions, in order), B = candidate (sees the task column; Core may use the help column), C = observer (ticks the feedback checklist). 1 minute preparation, about 3 minutes speaking, 1 minute feedback, then rotate.
 Task ! is the unexpected question: in the exam the candidate has not seen it — the examiner should read it without warning.
@@ -3156,6 +3200,7 @@
                   <a:srgbClr val="D4AF37"/>
                 </a:solidFill>
                 <a:latin typeface="Amiri" pitchFamily="2" charset="-78"/>
+                <a:ea typeface="Amiri" pitchFamily="2" charset="-78"/>
                 <a:cs typeface="Amiri" pitchFamily="2" charset="-78"/>
               </a:rPr>
               <a:t>م</a:t>
@@ -3362,6 +3407,7 @@
                   <a:srgbClr val="D4AF37"/>
                 </a:solidFill>
                 <a:latin typeface="Amiri" pitchFamily="2" charset="-78"/>
+                <a:ea typeface="Amiri" pitchFamily="2" charset="-78"/>
                 <a:cs typeface="Amiri" pitchFamily="2" charset="-78"/>
               </a:rPr>
               <a:t>وَرْشَةُ التَّحَدُّثِ — التَّعْلِيمُ وَالعَمَلُ وَالعَالَمُ الدُّوَلِيُّ</a:t>
@@ -3413,6 +3459,7 @@
                   <a:srgbClr val="C6D2E6"/>
                 </a:solidFill>
                 <a:latin typeface="Amiri" pitchFamily="2" charset="-78"/>
+                <a:ea typeface="Amiri" pitchFamily="2" charset="-78"/>
                 <a:cs typeface="Amiri" pitchFamily="2" charset="-78"/>
               </a:rPr>
               <a:t>يَسُرُّنِي</a:t>
@@ -3439,6 +3486,7 @@
                   <a:srgbClr val="C6D2E6"/>
                 </a:solidFill>
                 <a:latin typeface="Amiri" pitchFamily="2" charset="-78"/>
+                <a:ea typeface="Amiri" pitchFamily="2" charset="-78"/>
                 <a:cs typeface="Amiri" pitchFamily="2" charset="-78"/>
               </a:rPr>
               <a:t>أَوَدُّ أَنْ</a:t>
@@ -3871,6 +3919,7 @@
                   <a:srgbClr val="D4AF37"/>
                 </a:solidFill>
                 <a:latin typeface="Amiri" pitchFamily="2" charset="-78"/>
+                <a:ea typeface="Amiri" pitchFamily="2" charset="-78"/>
                 <a:cs typeface="Amiri" pitchFamily="2" charset="-78"/>
               </a:rPr>
               <a:t>م</a:t>
@@ -4191,6 +4240,7 @@
                   <a:srgbClr val="8A6D1E"/>
                 </a:solidFill>
                 <a:latin typeface="Amiri" pitchFamily="2" charset="-78"/>
+                <a:ea typeface="Amiri" pitchFamily="2" charset="-78"/>
                 <a:cs typeface="Amiri" pitchFamily="2" charset="-78"/>
               </a:rPr>
               <a:t>نِظَامَانِ دِرَاسِيَّانِ</a:t>
@@ -4471,6 +4521,7 @@
                   <a:srgbClr val="1B3B6F"/>
                 </a:solidFill>
                 <a:latin typeface="Amiri" pitchFamily="2" charset="-78"/>
+                <a:ea typeface="Amiri" pitchFamily="2" charset="-78"/>
                 <a:cs typeface="Amiri" pitchFamily="2" charset="-78"/>
               </a:rPr>
               <a:t>يَبْدَأُ فِي … ، وَأَدْرُسُ … ، وَيَنْتَهِي …</a:t>
@@ -4547,6 +4598,7 @@
                   <a:srgbClr val="1B3B6F"/>
                 </a:solidFill>
                 <a:latin typeface="Amiri" pitchFamily="2" charset="-78"/>
+                <a:ea typeface="Amiri" pitchFamily="2" charset="-78"/>
                 <a:cs typeface="Amiri" pitchFamily="2" charset="-78"/>
               </a:rPr>
               <a:t>كَيْفَ يَوْمُكِ الدِّرَاسِيُّ فِي بَرِيطَانْيَا؟</a:t>
@@ -4650,6 +4702,7 @@
                   <a:srgbClr val="1B3B6F"/>
                 </a:solidFill>
                 <a:latin typeface="Amiri" pitchFamily="2" charset="-78"/>
+                <a:ea typeface="Amiri" pitchFamily="2" charset="-78"/>
                 <a:cs typeface="Amiri" pitchFamily="2" charset="-78"/>
               </a:rPr>
               <a:t>عِنْدَنَا … بَيْنَمَا عِنْدَكُمْ … ؛ وَكِلَاهُمَا …</a:t>
@@ -4726,6 +4779,7 @@
                   <a:srgbClr val="1B3B6F"/>
                 </a:solidFill>
                 <a:latin typeface="Amiri" pitchFamily="2" charset="-78"/>
+                <a:ea typeface="Amiri" pitchFamily="2" charset="-78"/>
                 <a:cs typeface="Amiri" pitchFamily="2" charset="-78"/>
               </a:rPr>
               <a:t>وَمَا الفَرْقُ بَيْنَ مَدْرَسَتِكِ وَمَدْرَسَتِنَا؟</a:t>
@@ -4829,6 +4883,7 @@
                   <a:srgbClr val="1B3B6F"/>
                 </a:solidFill>
                 <a:latin typeface="Amiri" pitchFamily="2" charset="-78"/>
+                <a:ea typeface="Amiri" pitchFamily="2" charset="-78"/>
                 <a:cs typeface="Amiri" pitchFamily="2" charset="-78"/>
               </a:rPr>
               <a:t>أَوَّلًا … ثُمَّ … بِالإِضَافَةِ إِلَى ذٰلِكَ …</a:t>
@@ -4905,6 +4960,7 @@
                   <a:srgbClr val="1B3B6F"/>
                 </a:solidFill>
                 <a:latin typeface="Amiri" pitchFamily="2" charset="-78"/>
+                <a:ea typeface="Amiri" pitchFamily="2" charset="-78"/>
                 <a:cs typeface="Amiri" pitchFamily="2" charset="-78"/>
               </a:rPr>
               <a:t>كَيْفَ اسْتَعْدَدْتِ لِامْتِحَانَاتِكِ؟</a:t>
@@ -5008,6 +5064,7 @@
                   <a:srgbClr val="1B3B6F"/>
                 </a:solidFill>
                 <a:latin typeface="Amiri" pitchFamily="2" charset="-78"/>
+                <a:ea typeface="Amiri" pitchFamily="2" charset="-78"/>
                 <a:cs typeface="Amiri" pitchFamily="2" charset="-78"/>
               </a:rPr>
               <a:t>سَأَدْرُسُ … لِأَنِّي أَطْمَحُ إِلَى أَنْ …</a:t>
@@ -5084,6 +5141,7 @@
                   <a:srgbClr val="1B3B6F"/>
                 </a:solidFill>
                 <a:latin typeface="Amiri" pitchFamily="2" charset="-78"/>
+                <a:ea typeface="Amiri" pitchFamily="2" charset="-78"/>
                 <a:cs typeface="Amiri" pitchFamily="2" charset="-78"/>
               </a:rPr>
               <a:t>وَمَاذَا سَتَدْرُسِينَ بَعْدَ المَدْرَسَةِ؟</a:t>
@@ -5187,6 +5245,7 @@
                   <a:srgbClr val="1B3B6F"/>
                 </a:solidFill>
                 <a:latin typeface="Amiri" pitchFamily="2" charset="-78"/>
+                <a:ea typeface="Amiri" pitchFamily="2" charset="-78"/>
                 <a:cs typeface="Amiri" pitchFamily="2" charset="-78"/>
               </a:rPr>
               <a:t>إِذَا لَمْ أُقْبَلْ، فَسَوْفَ أَدْرُسُ …</a:t>
@@ -5263,6 +5322,7 @@
                   <a:srgbClr val="1B3B6F"/>
                 </a:solidFill>
                 <a:latin typeface="Amiri" pitchFamily="2" charset="-78"/>
+                <a:ea typeface="Amiri" pitchFamily="2" charset="-78"/>
                 <a:cs typeface="Amiri" pitchFamily="2" charset="-78"/>
               </a:rPr>
               <a:t>وَإِذَا لَمْ تُقْبَلِي فِي الصَّيْدَلَةِ؟</a:t>
@@ -5472,6 +5532,7 @@
                   <a:srgbClr val="D4AF37"/>
                 </a:solidFill>
                 <a:latin typeface="Amiri" pitchFamily="2" charset="-78"/>
+                <a:ea typeface="Amiri" pitchFamily="2" charset="-78"/>
                 <a:cs typeface="Amiri" pitchFamily="2" charset="-78"/>
               </a:rPr>
               <a:t>م</a:t>
@@ -5792,6 +5853,7 @@
                   <a:srgbClr val="8A6D1E"/>
                 </a:solidFill>
                 <a:latin typeface="Amiri" pitchFamily="2" charset="-78"/>
+                <a:ea typeface="Amiri" pitchFamily="2" charset="-78"/>
                 <a:cs typeface="Amiri" pitchFamily="2" charset="-78"/>
               </a:rPr>
               <a:t>الدِّرَاسَةُ وَالعَمَلُ فِي الخَارِجِ</a:t>
@@ -6072,6 +6134,7 @@
                   <a:srgbClr val="1B3B6F"/>
                 </a:solidFill>
                 <a:latin typeface="Amiri" pitchFamily="2" charset="-78"/>
+                <a:ea typeface="Amiri" pitchFamily="2" charset="-78"/>
                 <a:cs typeface="Amiri" pitchFamily="2" charset="-78"/>
               </a:rPr>
               <a:t>مِنْ نَاحِيَةٍ … وَمِنْ نَاحِيَةٍ أُخْرَى …</a:t>
@@ -6148,6 +6211,7 @@
                   <a:srgbClr val="1B3B6F"/>
                 </a:solidFill>
                 <a:latin typeface="Amiri" pitchFamily="2" charset="-78"/>
+                <a:ea typeface="Amiri" pitchFamily="2" charset="-78"/>
                 <a:cs typeface="Amiri" pitchFamily="2" charset="-78"/>
               </a:rPr>
               <a:t>هَلْ تَنْصَحِينَ الشَّبَابَ بِالدِّرَاسَةِ فِي الخَارِجِ؟</a:t>
@@ -6254,6 +6318,7 @@
                   <a:srgbClr val="1B3B6F"/>
                 </a:solidFill>
                 <a:latin typeface="Amiri" pitchFamily="2" charset="-78"/>
+                <a:ea typeface="Amiri" pitchFamily="2" charset="-78"/>
                 <a:cs typeface="Amiri" pitchFamily="2" charset="-78"/>
               </a:rPr>
               <a:t>أَوَّلًا … بِالإِضَافَةِ إِلَى ذٰلِكَ … ؛ وَالمُوَظَّفُ الَّذِي …</a:t>
@@ -6330,6 +6395,7 @@
                   <a:srgbClr val="1B3B6F"/>
                 </a:solidFill>
                 <a:latin typeface="Amiri" pitchFamily="2" charset="-78"/>
+                <a:ea typeface="Amiri" pitchFamily="2" charset="-78"/>
                 <a:cs typeface="Amiri" pitchFamily="2" charset="-78"/>
               </a:rPr>
               <a:t>مَا الَّذِي يَطْلُبُهُ أَصْحَابُ العَمَلِ اليَوْمَ؟</a:t>
@@ -6433,6 +6499,7 @@
                   <a:srgbClr val="1B3B6F"/>
                 </a:solidFill>
                 <a:latin typeface="Amiri" pitchFamily="2" charset="-78"/>
+                <a:ea typeface="Amiri" pitchFamily="2" charset="-78"/>
                 <a:cs typeface="Amiri" pitchFamily="2" charset="-78"/>
               </a:rPr>
               <a:t>عِنْدَمَا … كُنْتُ … ثُمَّ صِرْتُ … فَتَحَسَّنَتْ …</a:t>
@@ -6509,6 +6576,7 @@
                   <a:srgbClr val="1B3B6F"/>
                 </a:solidFill>
                 <a:latin typeface="Amiri" pitchFamily="2" charset="-78"/>
+                <a:ea typeface="Amiri" pitchFamily="2" charset="-78"/>
                 <a:cs typeface="Amiri" pitchFamily="2" charset="-78"/>
               </a:rPr>
               <a:t>هَلْ عِشْتِ تَجْرِبَةً مِثْلَ هٰذِهِ؟</a:t>
@@ -6612,6 +6680,7 @@
                   <a:srgbClr val="1B3B6F"/>
                 </a:solidFill>
                 <a:latin typeface="Amiri" pitchFamily="2" charset="-78"/>
+                <a:ea typeface="Amiri" pitchFamily="2" charset="-78"/>
                 <a:cs typeface="Amiri" pitchFamily="2" charset="-78"/>
               </a:rPr>
               <a:t>صَحِيحٌ أَنَّ … غَيْرَ أَنَّ … ؛ لِذٰلِكَ …</a:t>
@@ -6688,6 +6757,7 @@
                   <a:srgbClr val="1B3B6F"/>
                 </a:solidFill>
                 <a:latin typeface="Amiri" pitchFamily="2" charset="-78"/>
+                <a:ea typeface="Amiri" pitchFamily="2" charset="-78"/>
                 <a:cs typeface="Amiri" pitchFamily="2" charset="-78"/>
               </a:rPr>
               <a:t>لٰكِنَّ بَعْضَ الأُسَرِ تَخَافُ عَلَى أَبْنَائِهَا.</a:t>
@@ -6791,6 +6861,7 @@
                   <a:srgbClr val="1B3B6F"/>
                 </a:solidFill>
                 <a:latin typeface="Amiri" pitchFamily="2" charset="-78"/>
+                <a:ea typeface="Amiri" pitchFamily="2" charset="-78"/>
                 <a:cs typeface="Amiri" pitchFamily="2" charset="-78"/>
               </a:rPr>
               <a:t>لَوِ اسْتَطَعْتُ، لَاخْتَرْتُ … لِأَنَّ …</a:t>
@@ -6867,6 +6938,7 @@
                   <a:srgbClr val="1B3B6F"/>
                 </a:solidFill>
                 <a:latin typeface="Amiri" pitchFamily="2" charset="-78"/>
+                <a:ea typeface="Amiri" pitchFamily="2" charset="-78"/>
                 <a:cs typeface="Amiri" pitchFamily="2" charset="-78"/>
               </a:rPr>
               <a:t>لَوِ اسْتَطَعْتِ أَنْ تَعْمَلِي فِي أَيِّ بَلَدٍ، فَأَيُّهَا تَخْتَارِينَ؟</a:t>
@@ -7076,6 +7148,7 @@
                   <a:srgbClr val="D4AF37"/>
                 </a:solidFill>
                 <a:latin typeface="Amiri" pitchFamily="2" charset="-78"/>
+                <a:ea typeface="Amiri" pitchFamily="2" charset="-78"/>
                 <a:cs typeface="Amiri" pitchFamily="2" charset="-78"/>
               </a:rPr>
               <a:t>م</a:t>
@@ -7396,6 +7469,7 @@
                   <a:srgbClr val="8A6D1E"/>
                 </a:solidFill>
                 <a:latin typeface="Amiri" pitchFamily="2" charset="-78"/>
+                <a:ea typeface="Amiri" pitchFamily="2" charset="-78"/>
                 <a:cs typeface="Amiri" pitchFamily="2" charset="-78"/>
               </a:rPr>
               <a:t>وَرَقَةُ المُلَاحِظِ</a:t>
@@ -8866,6 +8940,7 @@
                   <a:srgbClr val="D4AF37"/>
                 </a:solidFill>
                 <a:latin typeface="Amiri" pitchFamily="2" charset="-78"/>
+                <a:ea typeface="Amiri" pitchFamily="2" charset="-78"/>
                 <a:cs typeface="Amiri" pitchFamily="2" charset="-78"/>
               </a:rPr>
               <a:t>م</a:t>
@@ -9186,6 +9261,7 @@
                   <a:srgbClr val="8A6D1E"/>
                 </a:solidFill>
                 <a:latin typeface="Amiri" pitchFamily="2" charset="-78"/>
+                <a:ea typeface="Amiri" pitchFamily="2" charset="-78"/>
                 <a:cs typeface="Amiri" pitchFamily="2" charset="-78"/>
               </a:rPr>
               <a:t>نَمُوذَجُ الإِجَابَةِ</a:t>
@@ -9428,6 +9504,7 @@
                   <a:srgbClr val="1B3B6F"/>
                 </a:solidFill>
                 <a:latin typeface="Amiri" pitchFamily="2" charset="-78"/>
+                <a:ea typeface="Amiri" pitchFamily="2" charset="-78"/>
                 <a:cs typeface="Amiri" pitchFamily="2" charset="-78"/>
               </a:rPr>
               <a:t>أَدْرُسُ الأَحْيَاءَ وَالكِيمْيَاءَ وَالعَرَبِيَّةَ.</a:t>
@@ -9504,6 +9581,7 @@
                   <a:srgbClr val="1B3B6F"/>
                 </a:solidFill>
                 <a:latin typeface="Amiri" pitchFamily="2" charset="-78"/>
+                <a:ea typeface="Amiri" pitchFamily="2" charset="-78"/>
                 <a:cs typeface="Amiri" pitchFamily="2" charset="-78"/>
               </a:rPr>
               <a:t>أَهْلًا! مَا المَوَادُّ الَّتِي تَدْرُسِينَهَا؟</a:t>
@@ -9607,6 +9685,7 @@
                   <a:srgbClr val="1B3B6F"/>
                 </a:solidFill>
                 <a:latin typeface="Amiri" pitchFamily="2" charset="-78"/>
+                <a:ea typeface="Amiri" pitchFamily="2" charset="-78"/>
                 <a:cs typeface="Amiri" pitchFamily="2" charset="-78"/>
               </a:rPr>
               <a:t>مَادَّتِيَ المُفَضَّلَةُ الأَحْيَاءُ، لِأَنَّهَا مُمْتِعَةٌ.</a:t>
@@ -9683,6 +9762,7 @@
                   <a:srgbClr val="1B3B6F"/>
                 </a:solidFill>
                 <a:latin typeface="Amiri" pitchFamily="2" charset="-78"/>
+                <a:ea typeface="Amiri" pitchFamily="2" charset="-78"/>
                 <a:cs typeface="Amiri" pitchFamily="2" charset="-78"/>
               </a:rPr>
               <a:t>وَمَا مَادَّتُكِ المُفَضَّلَةُ؟</a:t>
@@ -9786,6 +9866,7 @@
                   <a:srgbClr val="1B3B6F"/>
                 </a:solidFill>
                 <a:latin typeface="Amiri" pitchFamily="2" charset="-78"/>
+                <a:ea typeface="Amiri" pitchFamily="2" charset="-78"/>
                 <a:cs typeface="Amiri" pitchFamily="2" charset="-78"/>
               </a:rPr>
               <a:t>أُرِيدُ أَنْ أَكُونَ طَبِيبَةً.</a:t>
@@ -9862,6 +9943,7 @@
                   <a:srgbClr val="1B3B6F"/>
                 </a:solidFill>
                 <a:latin typeface="Amiri" pitchFamily="2" charset="-78"/>
+                <a:ea typeface="Amiri" pitchFamily="2" charset="-78"/>
                 <a:cs typeface="Amiri" pitchFamily="2" charset="-78"/>
               </a:rPr>
               <a:t>أَيَّ وَظِيفَةٍ تُرِيدِينَ فِي المُسْتَقْبَلِ؟</a:t>
@@ -9965,6 +10047,7 @@
                   <a:srgbClr val="1B3B6F"/>
                 </a:solidFill>
                 <a:latin typeface="Amiri" pitchFamily="2" charset="-78"/>
+                <a:ea typeface="Amiri" pitchFamily="2" charset="-78"/>
                 <a:cs typeface="Amiri" pitchFamily="2" charset="-78"/>
               </a:rPr>
               <a:t>هَلْ أَسْتَطِيعُ أَنْ أَتَدَرَّبَ فِي مُسْتَشْفًى؟</a:t>
@@ -10041,6 +10124,7 @@
                   <a:srgbClr val="1B3B6F"/>
                 </a:solidFill>
                 <a:latin typeface="Amiri" pitchFamily="2" charset="-78"/>
+                <a:ea typeface="Amiri" pitchFamily="2" charset="-78"/>
                 <a:cs typeface="Amiri" pitchFamily="2" charset="-78"/>
               </a:rPr>
               <a:t>فِكْرَةٌ جَيِّدَةٌ.</a:t>
@@ -10144,6 +10228,7 @@
                   <a:srgbClr val="1B3B6F"/>
                 </a:solidFill>
                 <a:latin typeface="Amiri" pitchFamily="2" charset="-78"/>
+                <a:ea typeface="Amiri" pitchFamily="2" charset="-78"/>
                 <a:cs typeface="Amiri" pitchFamily="2" charset="-78"/>
               </a:rPr>
               <a:t>أَتَكَلَّمُ الإِنْجْلِيزِيَّةَ وَالعَرَبِيَّةَ وَالأُرْدِيَّةَ.</a:t>
@@ -10220,6 +10305,7 @@
                   <a:srgbClr val="1B3B6F"/>
                 </a:solidFill>
                 <a:latin typeface="Amiri" pitchFamily="2" charset="-78"/>
+                <a:ea typeface="Amiri" pitchFamily="2" charset="-78"/>
                 <a:cs typeface="Amiri" pitchFamily="2" charset="-78"/>
               </a:rPr>
               <a:t>نَعَمْ. كَمْ لُغَةً تَتَكَلَّمِينَ؟</a:t>
@@ -10429,6 +10515,7 @@
                   <a:srgbClr val="D4AF37"/>
                 </a:solidFill>
                 <a:latin typeface="Amiri" pitchFamily="2" charset="-78"/>
+                <a:ea typeface="Amiri" pitchFamily="2" charset="-78"/>
                 <a:cs typeface="Amiri" pitchFamily="2" charset="-78"/>
               </a:rPr>
               <a:t>م</a:t>
@@ -10749,6 +10836,7 @@
                   <a:srgbClr val="8A6D1E"/>
                 </a:solidFill>
                 <a:latin typeface="Amiri" pitchFamily="2" charset="-78"/>
+                <a:ea typeface="Amiri" pitchFamily="2" charset="-78"/>
                 <a:cs typeface="Amiri" pitchFamily="2" charset="-78"/>
               </a:rPr>
               <a:t>نَمُوذَجُ الإِجَابَةِ</a:t>
@@ -10991,6 +11079,7 @@
                   <a:srgbClr val="1B3B6F"/>
                 </a:solidFill>
                 <a:latin typeface="Amiri" pitchFamily="2" charset="-78"/>
+                <a:ea typeface="Amiri" pitchFamily="2" charset="-78"/>
                 <a:cs typeface="Amiri" pitchFamily="2" charset="-78"/>
               </a:rPr>
               <a:t>صَبَاحَ النُّورِ. أَوَدُّ أَنْ أَتَقَدَّمَ لِوَظِيفَةِ مُوَظَّفَةِ الاسْتِقْبَالِ.</a:t>
@@ -11067,6 +11156,7 @@
                   <a:srgbClr val="1B3B6F"/>
                 </a:solidFill>
                 <a:latin typeface="Amiri" pitchFamily="2" charset="-78"/>
+                <a:ea typeface="Amiri" pitchFamily="2" charset="-78"/>
                 <a:cs typeface="Amiri" pitchFamily="2" charset="-78"/>
               </a:rPr>
               <a:t>صَبَاحَ الخَيْرِ، تَفَضَّلِي بِالجُلُوسِ.</a:t>
@@ -11170,6 +11260,7 @@
                   <a:srgbClr val="1B3B6F"/>
                 </a:solidFill>
                 <a:latin typeface="Amiri" pitchFamily="2" charset="-78"/>
+                <a:ea typeface="Amiri" pitchFamily="2" charset="-78"/>
                 <a:cs typeface="Amiri" pitchFamily="2" charset="-78"/>
               </a:rPr>
               <a:t>أَتَكَلَّمُ الإِنْجْلِيزِيَّةَ وَالعَرَبِيَّةَ بِطَلَاقَةٍ، وَالفَرَنْسِيَّةَ قَلِيلًا.</a:t>
@@ -11246,6 +11337,7 @@
                   <a:srgbClr val="1B3B6F"/>
                 </a:solidFill>
                 <a:latin typeface="Amiri" pitchFamily="2" charset="-78"/>
+                <a:ea typeface="Amiri" pitchFamily="2" charset="-78"/>
                 <a:cs typeface="Amiri" pitchFamily="2" charset="-78"/>
               </a:rPr>
               <a:t>مَا اللُّغَاتُ الَّتِي تَتَكَلَّمِينَهَا؟</a:t>
@@ -11349,6 +11441,7 @@
                   <a:srgbClr val="1B3B6F"/>
                 </a:solidFill>
                 <a:latin typeface="Amiri" pitchFamily="2" charset="-78"/>
+                <a:ea typeface="Amiri" pitchFamily="2" charset="-78"/>
                 <a:cs typeface="Amiri" pitchFamily="2" charset="-78"/>
               </a:rPr>
               <a:t>لِأَنِّي مُنَظَّمَةٌ وَصَبُورَةٌ؛ مَثَلًا، أُسَاعِدُ أَبِي فِي مَحَلِّهِ، وَأَتَعَامَلُ مَعَ زَبَائِنَ مِنْ ثَقَافَاتٍ مُخْتَلِفَةٍ.</a:t>
@@ -11425,6 +11518,7 @@
                   <a:srgbClr val="1B3B6F"/>
                 </a:solidFill>
                 <a:latin typeface="Amiri" pitchFamily="2" charset="-78"/>
+                <a:ea typeface="Amiri" pitchFamily="2" charset="-78"/>
                 <a:cs typeface="Amiri" pitchFamily="2" charset="-78"/>
               </a:rPr>
               <a:t>لِمَاذَا تُنَاسِبُكِ هٰذِهِ الوَظِيفَةُ؟</a:t>
@@ -11528,6 +11622,7 @@
                   <a:srgbClr val="1B3B6F"/>
                 </a:solidFill>
                 <a:latin typeface="Amiri" pitchFamily="2" charset="-78"/>
+                <a:ea typeface="Amiri" pitchFamily="2" charset="-78"/>
                 <a:cs typeface="Amiri" pitchFamily="2" charset="-78"/>
               </a:rPr>
               <a:t>كَمْ سَاعَةً فِي اليَوْمِ؟ وَكَمِ الرَّاتِبُ فِي السَّاعَةِ؟</a:t>
@@ -11604,6 +11699,7 @@
                   <a:srgbClr val="1B3B6F"/>
                 </a:solidFill>
                 <a:latin typeface="Amiri" pitchFamily="2" charset="-78"/>
+                <a:ea typeface="Amiri" pitchFamily="2" charset="-78"/>
                 <a:cs typeface="Amiri" pitchFamily="2" charset="-78"/>
               </a:rPr>
               <a:t>العَمَلُ مِنَ الأَحَدِ إِلَى الخَمِيسِ.</a:t>
@@ -11707,6 +11803,7 @@
                   <a:srgbClr val="1B3B6F"/>
                 </a:solidFill>
                 <a:latin typeface="Amiri" pitchFamily="2" charset="-78"/>
+                <a:ea typeface="Amiri" pitchFamily="2" charset="-78"/>
                 <a:cs typeface="Amiri" pitchFamily="2" charset="-78"/>
               </a:rPr>
               <a:t>نَعَمْ، زُرْتُ الأُرْدُنَّ السَّنَةَ المَاضِيَةَ، وَأَعْجَبَنِي كَرَمُ النَّاسِ هُنَاكَ.</a:t>
@@ -11783,6 +11880,7 @@
                   <a:srgbClr val="1B3B6F"/>
                 </a:solidFill>
                 <a:latin typeface="Amiri" pitchFamily="2" charset="-78"/>
+                <a:ea typeface="Amiri" pitchFamily="2" charset="-78"/>
                 <a:cs typeface="Amiri" pitchFamily="2" charset="-78"/>
               </a:rPr>
               <a:t>سِتُّ سَاعَاتٍ. هَلْ زُرْتِ بَلَدًا عَرَبِيًّا؟</a:t>
@@ -11992,6 +12090,7 @@
                   <a:srgbClr val="D4AF37"/>
                 </a:solidFill>
                 <a:latin typeface="Amiri" pitchFamily="2" charset="-78"/>
+                <a:ea typeface="Amiri" pitchFamily="2" charset="-78"/>
                 <a:cs typeface="Amiri" pitchFamily="2" charset="-78"/>
               </a:rPr>
               <a:t>م</a:t>
@@ -12312,6 +12411,7 @@
                   <a:srgbClr val="8A6D1E"/>
                 </a:solidFill>
                 <a:latin typeface="Amiri" pitchFamily="2" charset="-78"/>
+                <a:ea typeface="Amiri" pitchFamily="2" charset="-78"/>
                 <a:cs typeface="Amiri" pitchFamily="2" charset="-78"/>
               </a:rPr>
               <a:t>نَمُوذَجُ الإِجَابَةِ</a:t>
@@ -12554,6 +12654,7 @@
                   <a:srgbClr val="1B3B6F"/>
                 </a:solidFill>
                 <a:latin typeface="Amiri" pitchFamily="2" charset="-78"/>
+                <a:ea typeface="Amiri" pitchFamily="2" charset="-78"/>
                 <a:cs typeface="Amiri" pitchFamily="2" charset="-78"/>
               </a:rPr>
               <a:t>يَبْدَأُ فِي الثَّامِنَةِ وَالنِّصْفِ، وَأَدْرُسُ خَمْسَ حِصَصٍ، ثُمَّ أَبْقَى لِنَادِي العُلُومِ حَتَّى الرَّابِعَةِ.</a:t>
@@ -12630,6 +12731,7 @@
                   <a:srgbClr val="1B3B6F"/>
                 </a:solidFill>
                 <a:latin typeface="Amiri" pitchFamily="2" charset="-78"/>
+                <a:ea typeface="Amiri" pitchFamily="2" charset="-78"/>
                 <a:cs typeface="Amiri" pitchFamily="2" charset="-78"/>
               </a:rPr>
               <a:t>كَيْفَ يَوْمُكِ الدِّرَاسِيُّ فِي بَرِيطَانْيَا؟</a:t>
@@ -12733,6 +12835,7 @@
                   <a:srgbClr val="1B3B6F"/>
                 </a:solidFill>
                 <a:latin typeface="Amiri" pitchFamily="2" charset="-78"/>
+                <a:ea typeface="Amiri" pitchFamily="2" charset="-78"/>
                 <a:cs typeface="Amiri" pitchFamily="2" charset="-78"/>
               </a:rPr>
               <a:t>عِنْدَنَا زِيٌّ مَدْرَسِيٌّ وَعُطْلَةٌ يَوْمَيِ السَّبْتِ وَالأَحَدِ، بَيْنَمَا عُطْلَتُكُمُ الجُمُعَةُ وَالسَّبْتُ؛ وَفِي المَدْرَسَتَيْنِ يَحْتَرِمُ الطُّلَّابُ المُعَلِّمِينَ.</a:t>
@@ -12809,6 +12912,7 @@
                   <a:srgbClr val="1B3B6F"/>
                 </a:solidFill>
                 <a:latin typeface="Amiri" pitchFamily="2" charset="-78"/>
+                <a:ea typeface="Amiri" pitchFamily="2" charset="-78"/>
                 <a:cs typeface="Amiri" pitchFamily="2" charset="-78"/>
               </a:rPr>
               <a:t>وَمَا الفَرْقُ بَيْنَ مَدْرَسَتِكِ وَمَدْرَسَتِنَا؟</a:t>
@@ -12912,6 +13016,7 @@
                   <a:srgbClr val="1B3B6F"/>
                 </a:solidFill>
                 <a:latin typeface="Amiri" pitchFamily="2" charset="-78"/>
+                <a:ea typeface="Amiri" pitchFamily="2" charset="-78"/>
                 <a:cs typeface="Amiri" pitchFamily="2" charset="-78"/>
               </a:rPr>
               <a:t>أَوَّلًا، وَضَعْتُ جَدْوَلًا لِلْمُرَاجَعَةِ، ثُمَّ حَلَلْتُ امْتِحَانَاتٍ سَابِقَةً؛ بِالإِضَافَةِ إِلَى ذٰلِكَ، كُنْتُ أُرَاجِعُ مَعَ صَدِيقَتِي كُلَّ يَوْمِ أَحَدٍ.</a:t>
@@ -12988,6 +13093,7 @@
                   <a:srgbClr val="1B3B6F"/>
                 </a:solidFill>
                 <a:latin typeface="Amiri" pitchFamily="2" charset="-78"/>
+                <a:ea typeface="Amiri" pitchFamily="2" charset="-78"/>
                 <a:cs typeface="Amiri" pitchFamily="2" charset="-78"/>
               </a:rPr>
               <a:t>كَيْفَ اسْتَعْدَدْتِ لِامْتِحَانَاتِكِ؟</a:t>
@@ -13091,6 +13197,7 @@
                   <a:srgbClr val="1B3B6F"/>
                 </a:solidFill>
                 <a:latin typeface="Amiri" pitchFamily="2" charset="-78"/>
+                <a:ea typeface="Amiri" pitchFamily="2" charset="-78"/>
                 <a:cs typeface="Amiri" pitchFamily="2" charset="-78"/>
               </a:rPr>
               <a:t>سَأَدْرُسُ الصَّيْدَلَةَ، لِأَنِّي أَطْمَحُ إِلَى أَنْ أَعْمَلَ فِي مُنَظَّمَةٍ صِحِّيَّةٍ دُوَلِيَّةٍ.</a:t>
@@ -13167,6 +13274,7 @@
                   <a:srgbClr val="1B3B6F"/>
                 </a:solidFill>
                 <a:latin typeface="Amiri" pitchFamily="2" charset="-78"/>
+                <a:ea typeface="Amiri" pitchFamily="2" charset="-78"/>
                 <a:cs typeface="Amiri" pitchFamily="2" charset="-78"/>
               </a:rPr>
               <a:t>وَمَاذَا سَتَدْرُسِينَ بَعْدَ المَدْرَسَةِ؟</a:t>
@@ -13270,6 +13378,7 @@
                   <a:srgbClr val="1B3B6F"/>
                 </a:solidFill>
                 <a:latin typeface="Amiri" pitchFamily="2" charset="-78"/>
+                <a:ea typeface="Amiri" pitchFamily="2" charset="-78"/>
                 <a:cs typeface="Amiri" pitchFamily="2" charset="-78"/>
               </a:rPr>
               <a:t>إِذَا لَمْ أُقْبَلْ، فَسَوْفَ أَدْرُسُ الكِيمْيَاءَ سَنَةً، ثُمَّ أُحَاوِلُ مِنْ جَدِيدٍ.</a:t>
@@ -13346,6 +13455,7 @@
                   <a:srgbClr val="1B3B6F"/>
                 </a:solidFill>
                 <a:latin typeface="Amiri" pitchFamily="2" charset="-78"/>
+                <a:ea typeface="Amiri" pitchFamily="2" charset="-78"/>
                 <a:cs typeface="Amiri" pitchFamily="2" charset="-78"/>
               </a:rPr>
               <a:t>وَإِذَا لَمْ تُقْبَلِي فِي الصَّيْدَلَةِ؟</a:t>
@@ -13555,6 +13665,7 @@
                   <a:srgbClr val="D4AF37"/>
                 </a:solidFill>
                 <a:latin typeface="Amiri" pitchFamily="2" charset="-78"/>
+                <a:ea typeface="Amiri" pitchFamily="2" charset="-78"/>
                 <a:cs typeface="Amiri" pitchFamily="2" charset="-78"/>
               </a:rPr>
               <a:t>م</a:t>
@@ -13875,6 +13986,7 @@
                   <a:srgbClr val="8A6D1E"/>
                 </a:solidFill>
                 <a:latin typeface="Amiri" pitchFamily="2" charset="-78"/>
+                <a:ea typeface="Amiri" pitchFamily="2" charset="-78"/>
                 <a:cs typeface="Amiri" pitchFamily="2" charset="-78"/>
               </a:rPr>
               <a:t>نَمُوذَجُ الإِجَابَةِ</a:t>
@@ -14120,6 +14232,7 @@
                   <a:srgbClr val="1B3B6F"/>
                 </a:solidFill>
                 <a:latin typeface="Amiri" pitchFamily="2" charset="-78"/>
+                <a:ea typeface="Amiri" pitchFamily="2" charset="-78"/>
                 <a:cs typeface="Amiri" pitchFamily="2" charset="-78"/>
               </a:rPr>
               <a:t>مِنْ نَاحِيَةٍ، يَتَعَلَّمُ الطَّالِبُ لُغَةً وَثَقَافَةً جَدِيدَتَيْنِ وَيَعْتَمِدُ عَلَى نَفْسِهِ، وَمِنْ نَاحِيَةٍ أُخْرَى، قَدْ يَشْعُرُ بِالوَحْدَةِ، وَتَكُونُ التَّكَالِيفُ مُرْتَفِعَةً.</a:t>
@@ -14196,6 +14309,7 @@
                   <a:srgbClr val="1B3B6F"/>
                 </a:solidFill>
                 <a:latin typeface="Amiri" pitchFamily="2" charset="-78"/>
+                <a:ea typeface="Amiri" pitchFamily="2" charset="-78"/>
                 <a:cs typeface="Amiri" pitchFamily="2" charset="-78"/>
               </a:rPr>
               <a:t>هَلْ تَنْصَحِينَ الشَّبَابَ بِالدِّرَاسَةِ فِي الخَارِجِ؟</a:t>
@@ -14302,6 +14416,7 @@
                   <a:srgbClr val="1B3B6F"/>
                 </a:solidFill>
                 <a:latin typeface="Amiri" pitchFamily="2" charset="-78"/>
+                <a:ea typeface="Amiri" pitchFamily="2" charset="-78"/>
                 <a:cs typeface="Amiri" pitchFamily="2" charset="-78"/>
               </a:rPr>
               <a:t>أَوَّلًا، اللُّغَاتُ وَالتَّوَاصُلُ؛ بِالإِضَافَةِ إِلَى ذٰلِكَ، القُدْرَةُ عَلَى العَمَلِ مَعَ أَشْخَاصٍ مِنْ ثَقَافَاتٍ مُخْتَلِفَةٍ؛ فَالمُوَظَّفُ الَّذِي عَاشَ فِي الخَارِجِ يَفْهَمُ ذٰلِكَ بِسُهُولَةٍ.</a:t>
@@ -14378,6 +14493,7 @@
                   <a:srgbClr val="1B3B6F"/>
                 </a:solidFill>
                 <a:latin typeface="Amiri" pitchFamily="2" charset="-78"/>
+                <a:ea typeface="Amiri" pitchFamily="2" charset="-78"/>
                 <a:cs typeface="Amiri" pitchFamily="2" charset="-78"/>
               </a:rPr>
               <a:t>مَا الَّذِي يَطْلُبُهُ أَصْحَابُ العَمَلِ اليَوْمَ؟</a:t>
@@ -14481,6 +14597,7 @@
                   <a:srgbClr val="1B3B6F"/>
                 </a:solidFill>
                 <a:latin typeface="Amiri" pitchFamily="2" charset="-78"/>
+                <a:ea typeface="Amiri" pitchFamily="2" charset="-78"/>
                 <a:cs typeface="Amiri" pitchFamily="2" charset="-78"/>
               </a:rPr>
               <a:t>عِنْدَمَا شَارَكْتُ فِي تَبَادُلٍ فِي عَمَّانَ، كُنْتُ أَخْجَلُ مِنْ لَهْجَتِي فِي البِدَايَةِ، ثُمَّ صِرْتُ أَتَكَلَّمُ بِثِقَةٍ، فَتَحَسَّنَتْ دَرَجَتِي فِي العَرَبِيَّةِ كَثِيرًا.</a:t>
@@ -14557,6 +14674,7 @@
                   <a:srgbClr val="1B3B6F"/>
                 </a:solidFill>
                 <a:latin typeface="Amiri" pitchFamily="2" charset="-78"/>
+                <a:ea typeface="Amiri" pitchFamily="2" charset="-78"/>
                 <a:cs typeface="Amiri" pitchFamily="2" charset="-78"/>
               </a:rPr>
               <a:t>هَلْ عِشْتِ تَجْرِبَةً مِثْلَ هٰذِهِ؟</a:t>
@@ -14660,6 +14778,7 @@
                   <a:srgbClr val="1B3B6F"/>
                 </a:solidFill>
                 <a:latin typeface="Amiri" pitchFamily="2" charset="-78"/>
+                <a:ea typeface="Amiri" pitchFamily="2" charset="-78"/>
                 <a:cs typeface="Amiri" pitchFamily="2" charset="-78"/>
               </a:rPr>
               <a:t>صَحِيحٌ أَنَّ القَلَقَ طَبِيعِيٌّ، غَيْرَ أَنَّ بَرَامِجَ التَّبَادُلِ المُنَظَّمَةَ آمِنَةٌ، وَالتَّوَاصُلَ اليَوْمِيَّ سَهْلٌ؛ لِذٰلِكَ أَنْصَحُ بِالبَدْءِ بِرِحْلَةٍ قَصِيرَةٍ.</a:t>
@@ -14736,6 +14855,7 @@
                   <a:srgbClr val="1B3B6F"/>
                 </a:solidFill>
                 <a:latin typeface="Amiri" pitchFamily="2" charset="-78"/>
+                <a:ea typeface="Amiri" pitchFamily="2" charset="-78"/>
                 <a:cs typeface="Amiri" pitchFamily="2" charset="-78"/>
               </a:rPr>
               <a:t>لٰكِنَّ بَعْضَ الأُسَرِ تَخَافُ عَلَى أَبْنَائِهَا.</a:t>
@@ -14839,6 +14959,7 @@
                   <a:srgbClr val="1B3B6F"/>
                 </a:solidFill>
                 <a:latin typeface="Amiri" pitchFamily="2" charset="-78"/>
+                <a:ea typeface="Amiri" pitchFamily="2" charset="-78"/>
                 <a:cs typeface="Amiri" pitchFamily="2" charset="-78"/>
               </a:rPr>
               <a:t>لَوِ اسْتَطَعْتُ، لَاخْتَرْتُ الإِمَارَاتِ، لِأَنَّهَا تَجْمَعُ بَيْنَ اللُّغَةِ العَرَبِيَّةِ وَبِيئَةِ عَمَلٍ دُوَلِيَّةٍ فِيهَا أَكْثَرُ مِنْ مِئَتَيْ جِنْسِيَّةٍ.</a:t>
@@ -14915,6 +15036,7 @@
                   <a:srgbClr val="1B3B6F"/>
                 </a:solidFill>
                 <a:latin typeface="Amiri" pitchFamily="2" charset="-78"/>
+                <a:ea typeface="Amiri" pitchFamily="2" charset="-78"/>
                 <a:cs typeface="Amiri" pitchFamily="2" charset="-78"/>
               </a:rPr>
               <a:t>لَوِ اسْتَطَعْتِ أَنْ تَعْمَلِي فِي أَيِّ بَلَدٍ، فَأَيُّهَا تَخْتَارِينَ؟</a:t>
@@ -15124,6 +15246,7 @@
                   <a:srgbClr val="D4AF37"/>
                 </a:solidFill>
                 <a:latin typeface="Amiri" pitchFamily="2" charset="-78"/>
+                <a:ea typeface="Amiri" pitchFamily="2" charset="-78"/>
                 <a:cs typeface="Amiri" pitchFamily="2" charset="-78"/>
               </a:rPr>
               <a:t>م</a:t>
@@ -15444,6 +15567,7 @@
                   <a:srgbClr val="8A6D1E"/>
                 </a:solidFill>
                 <a:latin typeface="Amiri" pitchFamily="2" charset="-78"/>
+                <a:ea typeface="Amiri" pitchFamily="2" charset="-78"/>
                 <a:cs typeface="Amiri" pitchFamily="2" charset="-78"/>
               </a:rPr>
               <a:t>دِرَاسَتِي وَمُسْتَقْبَلِي</a:t>
@@ -15724,6 +15848,7 @@
                   <a:srgbClr val="1B3B6F"/>
                 </a:solidFill>
                 <a:latin typeface="Amiri" pitchFamily="2" charset="-78"/>
+                <a:ea typeface="Amiri" pitchFamily="2" charset="-78"/>
                 <a:cs typeface="Amiri" pitchFamily="2" charset="-78"/>
               </a:rPr>
               <a:t>مَادَّتِي المُفَضَّلَةُ … لِأَنَّ …</a:t>
@@ -15800,6 +15925,7 @@
                   <a:srgbClr val="1B3B6F"/>
                 </a:solidFill>
                 <a:latin typeface="Amiri" pitchFamily="2" charset="-78"/>
+                <a:ea typeface="Amiri" pitchFamily="2" charset="-78"/>
                 <a:cs typeface="Amiri" pitchFamily="2" charset="-78"/>
               </a:rPr>
               <a:t>مَا مَادَّتُكَ المُفَضَّلَةُ؟</a:t>
@@ -15968,6 +16094,7 @@
                   <a:srgbClr val="1B3B6F"/>
                 </a:solidFill>
                 <a:latin typeface="Amiri" pitchFamily="2" charset="-78"/>
+                <a:ea typeface="Amiri" pitchFamily="2" charset="-78"/>
                 <a:cs typeface="Amiri" pitchFamily="2" charset="-78"/>
               </a:rPr>
               <a:t>أُرِيدُ أَنْ أَكُونَ …</a:t>
@@ -16044,6 +16171,7 @@
                   <a:srgbClr val="1B3B6F"/>
                 </a:solidFill>
                 <a:latin typeface="Amiri" pitchFamily="2" charset="-78"/>
+                <a:ea typeface="Amiri" pitchFamily="2" charset="-78"/>
                 <a:cs typeface="Amiri" pitchFamily="2" charset="-78"/>
               </a:rPr>
               <a:t>مَاذَا تُرِيدُ أَنْ تَعْمَلَ فِي المُسْتَقْبَلِ؟</a:t>
@@ -16212,6 +16340,7 @@
                   <a:srgbClr val="1B3B6F"/>
                 </a:solidFill>
                 <a:latin typeface="Amiri" pitchFamily="2" charset="-78"/>
+                <a:ea typeface="Amiri" pitchFamily="2" charset="-78"/>
                 <a:cs typeface="Amiri" pitchFamily="2" charset="-78"/>
               </a:rPr>
               <a:t>أَتَكَلَّمُ …</a:t>
@@ -16288,6 +16417,7 @@
                   <a:srgbClr val="1B3B6F"/>
                 </a:solidFill>
                 <a:latin typeface="Amiri" pitchFamily="2" charset="-78"/>
+                <a:ea typeface="Amiri" pitchFamily="2" charset="-78"/>
                 <a:cs typeface="Amiri" pitchFamily="2" charset="-78"/>
               </a:rPr>
               <a:t>كَمْ لُغَةً تَتَكَلَّمُ؟</a:t>
@@ -16456,6 +16586,7 @@
                   <a:srgbClr val="1B3B6F"/>
                 </a:solidFill>
                 <a:latin typeface="Amiri" pitchFamily="2" charset="-78"/>
+                <a:ea typeface="Amiri" pitchFamily="2" charset="-78"/>
                 <a:cs typeface="Amiri" pitchFamily="2" charset="-78"/>
               </a:rPr>
               <a:t>نَعَمْ، سَافَرْتُ إِلَى …</a:t>
@@ -16532,6 +16663,7 @@
                   <a:srgbClr val="1B3B6F"/>
                 </a:solidFill>
                 <a:latin typeface="Amiri" pitchFamily="2" charset="-78"/>
+                <a:ea typeface="Amiri" pitchFamily="2" charset="-78"/>
                 <a:cs typeface="Amiri" pitchFamily="2" charset="-78"/>
               </a:rPr>
               <a:t>هَلْ سَافَرْتَ إِلَى الخَارِجِ؟</a:t>
@@ -16700,6 +16832,7 @@
                   <a:srgbClr val="1B3B6F"/>
                 </a:solidFill>
                 <a:latin typeface="Amiri" pitchFamily="2" charset="-78"/>
+                <a:ea typeface="Amiri" pitchFamily="2" charset="-78"/>
                 <a:cs typeface="Amiri" pitchFamily="2" charset="-78"/>
               </a:rPr>
               <a:t>أُحِبُّ …</a:t>
@@ -16776,6 +16909,7 @@
                   <a:srgbClr val="1B3B6F"/>
                 </a:solidFill>
                 <a:latin typeface="Amiri" pitchFamily="2" charset="-78"/>
+                <a:ea typeface="Amiri" pitchFamily="2" charset="-78"/>
                 <a:cs typeface="Amiri" pitchFamily="2" charset="-78"/>
               </a:rPr>
               <a:t>مَا عَادَةٌ تُحِبُّهَا فِي ثَقَافَتِكَ؟</a:t>
@@ -16930,6 +17064,7 @@
                   <a:srgbClr val="1B3B6F"/>
                 </a:solidFill>
                 <a:latin typeface="Amiri" pitchFamily="2" charset="-78"/>
+                <a:ea typeface="Amiri" pitchFamily="2" charset="-78"/>
                 <a:cs typeface="Amiri" pitchFamily="2" charset="-78"/>
               </a:rPr>
               <a:t>عَفْوًا، هَلْ يُمْكِنُ أَنْ تُعِيدَ السُّؤَالَ؟</a:t>
@@ -17063,6 +17198,7 @@
                   <a:srgbClr val="D4AF37"/>
                 </a:solidFill>
                 <a:latin typeface="Amiri" pitchFamily="2" charset="-78"/>
+                <a:ea typeface="Amiri" pitchFamily="2" charset="-78"/>
                 <a:cs typeface="Amiri" pitchFamily="2" charset="-78"/>
               </a:rPr>
               <a:t>م</a:t>
@@ -17383,6 +17519,7 @@
                   <a:srgbClr val="8A6D1E"/>
                 </a:solidFill>
                 <a:latin typeface="Amiri" pitchFamily="2" charset="-78"/>
+                <a:ea typeface="Amiri" pitchFamily="2" charset="-78"/>
                 <a:cs typeface="Amiri" pitchFamily="2" charset="-78"/>
               </a:rPr>
               <a:t>مِنَ المَدْرَسَةِ إِلَى العَالَمِ</a:t>
@@ -17663,6 +17800,7 @@
                   <a:srgbClr val="1B3B6F"/>
                 </a:solidFill>
                 <a:latin typeface="Amiri" pitchFamily="2" charset="-78"/>
+                <a:ea typeface="Amiri" pitchFamily="2" charset="-78"/>
                 <a:cs typeface="Amiri" pitchFamily="2" charset="-78"/>
               </a:rPr>
               <a:t>كُنْتُ … أَمَّا الآنَ فَأَدْرُسُ …</a:t>
@@ -17739,6 +17877,7 @@
                   <a:srgbClr val="1B3B6F"/>
                 </a:solidFill>
                 <a:latin typeface="Amiri" pitchFamily="2" charset="-78"/>
+                <a:ea typeface="Amiri" pitchFamily="2" charset="-78"/>
                 <a:cs typeface="Amiri" pitchFamily="2" charset="-78"/>
               </a:rPr>
               <a:t>كَيْفَ تَغَيَّرَتْ دِرَاسَتُكَ مُنْذُ الابْتِدَائِيَّةِ؟</a:t>
@@ -17842,6 +17981,7 @@
                   <a:srgbClr val="1B3B6F"/>
                 </a:solidFill>
                 <a:latin typeface="Amiri" pitchFamily="2" charset="-78"/>
+                <a:ea typeface="Amiri" pitchFamily="2" charset="-78"/>
                 <a:cs typeface="Amiri" pitchFamily="2" charset="-78"/>
               </a:rPr>
               <a:t>أَوَّلًا … بِالإِضَافَةِ إِلَى ذٰلِكَ …</a:t>
@@ -17918,6 +18058,7 @@
                   <a:srgbClr val="1B3B6F"/>
                 </a:solidFill>
                 <a:latin typeface="Amiri" pitchFamily="2" charset="-78"/>
+                <a:ea typeface="Amiri" pitchFamily="2" charset="-78"/>
                 <a:cs typeface="Amiri" pitchFamily="2" charset="-78"/>
               </a:rPr>
               <a:t>مَا الصِّفَاتُ الَّتِي يَحْتَاجُ إِلَيْهَا المُوَظَّفُ الجَيِّدُ؟</a:t>
@@ -18021,6 +18162,7 @@
                   <a:srgbClr val="1B3B6F"/>
                 </a:solidFill>
                 <a:latin typeface="Amiri" pitchFamily="2" charset="-78"/>
+                <a:ea typeface="Amiri" pitchFamily="2" charset="-78"/>
                 <a:cs typeface="Amiri" pitchFamily="2" charset="-78"/>
               </a:rPr>
               <a:t>تُسَاعِدُنِي … ؛ مَثَلًا …</a:t>
@@ -18097,6 +18239,7 @@
                   <a:srgbClr val="1B3B6F"/>
                 </a:solidFill>
                 <a:latin typeface="Amiri" pitchFamily="2" charset="-78"/>
+                <a:ea typeface="Amiri" pitchFamily="2" charset="-78"/>
                 <a:cs typeface="Amiri" pitchFamily="2" charset="-78"/>
               </a:rPr>
               <a:t>كَيْفَ تُسَاعِدُكَ اللُّغَاتُ فِي حَيَاتِكَ؟</a:t>
@@ -18200,6 +18343,7 @@
                   <a:srgbClr val="1B3B6F"/>
                 </a:solidFill>
                 <a:latin typeface="Amiri" pitchFamily="2" charset="-78"/>
+                <a:ea typeface="Amiri" pitchFamily="2" charset="-78"/>
                 <a:cs typeface="Amiri" pitchFamily="2" charset="-78"/>
               </a:rPr>
               <a:t>فِي … بَيْنَمَا فِي … ؛ وَلٰكِنَّ …</a:t>
@@ -18276,6 +18420,7 @@
                   <a:srgbClr val="1B3B6F"/>
                 </a:solidFill>
                 <a:latin typeface="Amiri" pitchFamily="2" charset="-78"/>
+                <a:ea typeface="Amiri" pitchFamily="2" charset="-78"/>
                 <a:cs typeface="Amiri" pitchFamily="2" charset="-78"/>
               </a:rPr>
               <a:t>قَارِنْ بَيْنَ ثَقَافَتَيْنِ تَعْرِفُهُمَا.</a:t>
@@ -18379,6 +18524,7 @@
                   <a:srgbClr val="1B3B6F"/>
                 </a:solidFill>
                 <a:latin typeface="Amiri" pitchFamily="2" charset="-78"/>
+                <a:ea typeface="Amiri" pitchFamily="2" charset="-78"/>
                 <a:cs typeface="Amiri" pitchFamily="2" charset="-78"/>
               </a:rPr>
               <a:t>أَطْمَحُ إِلَى أَنْ … وَإِذَا …</a:t>
@@ -18455,6 +18601,7 @@
                   <a:srgbClr val="1B3B6F"/>
                 </a:solidFill>
                 <a:latin typeface="Amiri" pitchFamily="2" charset="-78"/>
+                <a:ea typeface="Amiri" pitchFamily="2" charset="-78"/>
                 <a:cs typeface="Amiri" pitchFamily="2" charset="-78"/>
               </a:rPr>
               <a:t>أَيْنَ تَرَى نَفْسَكَ بَعْدَ عَشْرِ سَنَوَاتٍ؟</a:t>
@@ -18664,6 +18811,7 @@
                   <a:srgbClr val="D4AF37"/>
                 </a:solidFill>
                 <a:latin typeface="Amiri" pitchFamily="2" charset="-78"/>
+                <a:ea typeface="Amiri" pitchFamily="2" charset="-78"/>
                 <a:cs typeface="Amiri" pitchFamily="2" charset="-78"/>
               </a:rPr>
               <a:t>م</a:t>
@@ -18984,6 +19132,7 @@
                   <a:srgbClr val="8A6D1E"/>
                 </a:solidFill>
                 <a:latin typeface="Amiri" pitchFamily="2" charset="-78"/>
+                <a:ea typeface="Amiri" pitchFamily="2" charset="-78"/>
                 <a:cs typeface="Amiri" pitchFamily="2" charset="-78"/>
               </a:rPr>
               <a:t>العَمَلُ فِي عَالَمٍ مُتَّصِلٍ</a:t>
@@ -19264,6 +19413,7 @@
                   <a:srgbClr val="1B3B6F"/>
                 </a:solidFill>
                 <a:latin typeface="Amiri" pitchFamily="2" charset="-78"/>
+                <a:ea typeface="Amiri" pitchFamily="2" charset="-78"/>
                 <a:cs typeface="Amiri" pitchFamily="2" charset="-78"/>
               </a:rPr>
               <a:t>صَحِيحٌ أَنَّ … غَيْرَ أَنَّ …</a:t>
@@ -19340,6 +19490,7 @@
                   <a:srgbClr val="1B3B6F"/>
                 </a:solidFill>
                 <a:latin typeface="Amiri" pitchFamily="2" charset="-78"/>
+                <a:ea typeface="Amiri" pitchFamily="2" charset="-78"/>
                 <a:cs typeface="Amiri" pitchFamily="2" charset="-78"/>
               </a:rPr>
               <a:t>هَلِ الشَّهَادَاتُ أَهَمُّ مِنَ الخِبْرَةِ؟</a:t>
@@ -19443,6 +19594,7 @@
                   <a:srgbClr val="1B3B6F"/>
                 </a:solidFill>
                 <a:latin typeface="Amiri" pitchFamily="2" charset="-78"/>
+                <a:ea typeface="Amiri" pitchFamily="2" charset="-78"/>
                 <a:cs typeface="Amiri" pitchFamily="2" charset="-78"/>
               </a:rPr>
               <a:t>أَرَى أَنَّ … لِأَنَّ … مِمَّا …</a:t>
@@ -19519,6 +19671,7 @@
                   <a:srgbClr val="1B3B6F"/>
                 </a:solidFill>
                 <a:latin typeface="Amiri" pitchFamily="2" charset="-78"/>
+                <a:ea typeface="Amiri" pitchFamily="2" charset="-78"/>
                 <a:cs typeface="Amiri" pitchFamily="2" charset="-78"/>
               </a:rPr>
               <a:t>هَلْ يَجِبُ أَنْ يَتَعَلَّمَ كُلُّ طَالِبٍ لُغَةً ثَانِيَةً؟</a:t>
@@ -19622,6 +19775,7 @@
                   <a:srgbClr val="1B3B6F"/>
                 </a:solidFill>
                 <a:latin typeface="Amiri" pitchFamily="2" charset="-78"/>
+                <a:ea typeface="Amiri" pitchFamily="2" charset="-78"/>
                 <a:cs typeface="Amiri" pitchFamily="2" charset="-78"/>
               </a:rPr>
               <a:t>كَانَ النَّاسُ … أَمَّا اليَوْمَ فَيَعْمَلُ …</a:t>
@@ -19698,6 +19852,7 @@
                   <a:srgbClr val="1B3B6F"/>
                 </a:solidFill>
                 <a:latin typeface="Amiri" pitchFamily="2" charset="-78"/>
+                <a:ea typeface="Amiri" pitchFamily="2" charset="-78"/>
                 <a:cs typeface="Amiri" pitchFamily="2" charset="-78"/>
               </a:rPr>
               <a:t>كَيْفَ غَيَّرَتِ العَوْلَمَةُ عَالَمَ العَمَلِ؟</a:t>
@@ -19801,6 +19956,7 @@
                   <a:srgbClr val="1B3B6F"/>
                 </a:solidFill>
                 <a:latin typeface="Amiri" pitchFamily="2" charset="-78"/>
+                <a:ea typeface="Amiri" pitchFamily="2" charset="-78"/>
                 <a:cs typeface="Amiri" pitchFamily="2" charset="-78"/>
               </a:rPr>
               <a:t>لَيْسَ … فَقَطْ، بَلْ …</a:t>
@@ -19877,6 +20033,7 @@
                   <a:srgbClr val="1B3B6F"/>
                 </a:solidFill>
                 <a:latin typeface="Amiri" pitchFamily="2" charset="-78"/>
+                <a:ea typeface="Amiri" pitchFamily="2" charset="-78"/>
                 <a:cs typeface="Amiri" pitchFamily="2" charset="-78"/>
               </a:rPr>
               <a:t>مَا دَوْرُ المَدْرَسَةِ فِي إِعْدَادِنَا لِلْعَالَمِ؟</a:t>
@@ -19980,6 +20137,7 @@
                   <a:srgbClr val="1B3B6F"/>
                 </a:solidFill>
                 <a:latin typeface="Amiri" pitchFamily="2" charset="-78"/>
+                <a:ea typeface="Amiri" pitchFamily="2" charset="-78"/>
                 <a:cs typeface="Amiri" pitchFamily="2" charset="-78"/>
               </a:rPr>
               <a:t>لَوْ عُرِضَتْ عَلَيَّ، لَقَبِلْتُهَا بِشَرْطِ أَنْ …</a:t>
@@ -20056,6 +20214,7 @@
                   <a:srgbClr val="1B3B6F"/>
                 </a:solidFill>
                 <a:latin typeface="Amiri" pitchFamily="2" charset="-78"/>
+                <a:ea typeface="Amiri" pitchFamily="2" charset="-78"/>
                 <a:cs typeface="Amiri" pitchFamily="2" charset="-78"/>
               </a:rPr>
               <a:t>لَوْ عُرِضَتْ عَلَيْكَ وَظِيفَةٌ فِي بَلَدٍ بَعِيدٍ، هَلْ تَقْبَلُهَا؟</a:t>
@@ -20265,6 +20424,7 @@
                   <a:srgbClr val="D4AF37"/>
                 </a:solidFill>
                 <a:latin typeface="Amiri" pitchFamily="2" charset="-78"/>
+                <a:ea typeface="Amiri" pitchFamily="2" charset="-78"/>
                 <a:cs typeface="Amiri" pitchFamily="2" charset="-78"/>
               </a:rPr>
               <a:t>م</a:t>
@@ -20585,6 +20745,7 @@
                   <a:srgbClr val="8A6D1E"/>
                 </a:solidFill>
                 <a:latin typeface="Amiri" pitchFamily="2" charset="-78"/>
+                <a:ea typeface="Amiri" pitchFamily="2" charset="-78"/>
                 <a:cs typeface="Amiri" pitchFamily="2" charset="-78"/>
               </a:rPr>
               <a:t>آدَابُ الصَّفِّ</a:t>
@@ -22116,6 +22277,7 @@
                   <a:srgbClr val="D4AF37"/>
                 </a:solidFill>
                 <a:latin typeface="Amiri" pitchFamily="2" charset="-78"/>
+                <a:ea typeface="Amiri" pitchFamily="2" charset="-78"/>
                 <a:cs typeface="Amiri" pitchFamily="2" charset="-78"/>
               </a:rPr>
               <a:t>م</a:t>
@@ -22436,6 +22598,7 @@
                   <a:srgbClr val="8A6D1E"/>
                 </a:solidFill>
                 <a:latin typeface="Amiri" pitchFamily="2" charset="-78"/>
+                <a:ea typeface="Amiri" pitchFamily="2" charset="-78"/>
                 <a:cs typeface="Amiri" pitchFamily="2" charset="-78"/>
               </a:rPr>
               <a:t>نَمُوذَجُ الإِجَابَةِ</a:t>
@@ -22678,6 +22841,7 @@
                   <a:srgbClr val="1B3B6F"/>
                 </a:solidFill>
                 <a:latin typeface="Amiri" pitchFamily="2" charset="-78"/>
+                <a:ea typeface="Amiri" pitchFamily="2" charset="-78"/>
                 <a:cs typeface="Amiri" pitchFamily="2" charset="-78"/>
               </a:rPr>
               <a:t>مَادَّتِيَ المُفَضَّلَةُ الرِّيَاضِيَّاتُ، لِأَنَّهَا سَهْلَةٌ.</a:t>
@@ -22754,6 +22918,7 @@
                   <a:srgbClr val="1B3B6F"/>
                 </a:solidFill>
                 <a:latin typeface="Amiri" pitchFamily="2" charset="-78"/>
+                <a:ea typeface="Amiri" pitchFamily="2" charset="-78"/>
                 <a:cs typeface="Amiri" pitchFamily="2" charset="-78"/>
               </a:rPr>
               <a:t>مَا مَادَّتُكَ المُفَضَّلَةُ؟</a:t>
@@ -22857,6 +23022,7 @@
                   <a:srgbClr val="1B3B6F"/>
                 </a:solidFill>
                 <a:latin typeface="Amiri" pitchFamily="2" charset="-78"/>
+                <a:ea typeface="Amiri" pitchFamily="2" charset="-78"/>
                 <a:cs typeface="Amiri" pitchFamily="2" charset="-78"/>
               </a:rPr>
               <a:t>أُرِيدُ أَنْ أَكُونَ مُحَامِيًا.</a:t>
@@ -22933,6 +23099,7 @@
                   <a:srgbClr val="1B3B6F"/>
                 </a:solidFill>
                 <a:latin typeface="Amiri" pitchFamily="2" charset="-78"/>
+                <a:ea typeface="Amiri" pitchFamily="2" charset="-78"/>
                 <a:cs typeface="Amiri" pitchFamily="2" charset="-78"/>
               </a:rPr>
               <a:t>مَاذَا تُرِيدُ أَنْ تَعْمَلَ فِي المُسْتَقْبَلِ؟</a:t>
@@ -23036,6 +23203,7 @@
                   <a:srgbClr val="1B3B6F"/>
                 </a:solidFill>
                 <a:latin typeface="Amiri" pitchFamily="2" charset="-78"/>
+                <a:ea typeface="Amiri" pitchFamily="2" charset="-78"/>
                 <a:cs typeface="Amiri" pitchFamily="2" charset="-78"/>
               </a:rPr>
               <a:t>أَتَكَلَّمُ لُغَتَيْنِ: الإِنْجْلِيزِيَّةَ وَالعَرَبِيَّةَ.</a:t>
@@ -23112,6 +23280,7 @@
                   <a:srgbClr val="1B3B6F"/>
                 </a:solidFill>
                 <a:latin typeface="Amiri" pitchFamily="2" charset="-78"/>
+                <a:ea typeface="Amiri" pitchFamily="2" charset="-78"/>
                 <a:cs typeface="Amiri" pitchFamily="2" charset="-78"/>
               </a:rPr>
               <a:t>كَمْ لُغَةً تَتَكَلَّمُ؟</a:t>
@@ -23215,6 +23384,7 @@
                   <a:srgbClr val="1B3B6F"/>
                 </a:solidFill>
                 <a:latin typeface="Amiri" pitchFamily="2" charset="-78"/>
+                <a:ea typeface="Amiri" pitchFamily="2" charset="-78"/>
                 <a:cs typeface="Amiri" pitchFamily="2" charset="-78"/>
               </a:rPr>
               <a:t>نَعَمْ، سَافَرْتُ إِلَى مِصْرَ.</a:t>
@@ -23291,6 +23461,7 @@
                   <a:srgbClr val="1B3B6F"/>
                 </a:solidFill>
                 <a:latin typeface="Amiri" pitchFamily="2" charset="-78"/>
+                <a:ea typeface="Amiri" pitchFamily="2" charset="-78"/>
                 <a:cs typeface="Amiri" pitchFamily="2" charset="-78"/>
               </a:rPr>
               <a:t>هَلْ سَافَرْتَ إِلَى الخَارِجِ؟</a:t>
@@ -23394,6 +23565,7 @@
                   <a:srgbClr val="1B3B6F"/>
                 </a:solidFill>
                 <a:latin typeface="Amiri" pitchFamily="2" charset="-78"/>
+                <a:ea typeface="Amiri" pitchFamily="2" charset="-78"/>
                 <a:cs typeface="Amiri" pitchFamily="2" charset="-78"/>
               </a:rPr>
               <a:t>أُحِبُّ الضِّيَافَةَ، لِأَنَّنَا نُرَحِّبُ بِكُلِّ ضَيْفٍ.</a:t>
@@ -23470,6 +23642,7 @@
                   <a:srgbClr val="1B3B6F"/>
                 </a:solidFill>
                 <a:latin typeface="Amiri" pitchFamily="2" charset="-78"/>
+                <a:ea typeface="Amiri" pitchFamily="2" charset="-78"/>
                 <a:cs typeface="Amiri" pitchFamily="2" charset="-78"/>
               </a:rPr>
               <a:t>مَا عَادَةٌ تُحِبُّهَا فِي ثَقَافَتِكَ؟</a:t>
@@ -23679,6 +23852,7 @@
                   <a:srgbClr val="D4AF37"/>
                 </a:solidFill>
                 <a:latin typeface="Amiri" pitchFamily="2" charset="-78"/>
+                <a:ea typeface="Amiri" pitchFamily="2" charset="-78"/>
                 <a:cs typeface="Amiri" pitchFamily="2" charset="-78"/>
               </a:rPr>
               <a:t>م</a:t>
@@ -23999,6 +24173,7 @@
                   <a:srgbClr val="8A6D1E"/>
                 </a:solidFill>
                 <a:latin typeface="Amiri" pitchFamily="2" charset="-78"/>
+                <a:ea typeface="Amiri" pitchFamily="2" charset="-78"/>
                 <a:cs typeface="Amiri" pitchFamily="2" charset="-78"/>
               </a:rPr>
               <a:t>نَمُوذَجُ الإِجَابَةِ</a:t>
@@ -24241,6 +24416,7 @@
                   <a:srgbClr val="1B3B6F"/>
                 </a:solidFill>
                 <a:latin typeface="Amiri" pitchFamily="2" charset="-78"/>
+                <a:ea typeface="Amiri" pitchFamily="2" charset="-78"/>
                 <a:cs typeface="Amiri" pitchFamily="2" charset="-78"/>
               </a:rPr>
               <a:t>كُنْتُ أَدْرُسُ مَوَادَّ قَلِيلَةً، أَمَّا الآنَ فَأَدْرُسُ تِسْعَ مَوَادَّ، وَسَأَخْتَارُ ثَلَاثًا فَقَطْ فِي السَّنَةِ القَادِمَةِ.</a:t>
@@ -24317,6 +24493,7 @@
                   <a:srgbClr val="1B3B6F"/>
                 </a:solidFill>
                 <a:latin typeface="Amiri" pitchFamily="2" charset="-78"/>
+                <a:ea typeface="Amiri" pitchFamily="2" charset="-78"/>
                 <a:cs typeface="Amiri" pitchFamily="2" charset="-78"/>
               </a:rPr>
               <a:t>كَيْفَ تَغَيَّرَتْ دِرَاسَتُكَ مُنْذُ الابْتِدَائِيَّةِ؟</a:t>
@@ -24420,6 +24597,7 @@
                   <a:srgbClr val="1B3B6F"/>
                 </a:solidFill>
                 <a:latin typeface="Amiri" pitchFamily="2" charset="-78"/>
+                <a:ea typeface="Amiri" pitchFamily="2" charset="-78"/>
                 <a:cs typeface="Amiri" pitchFamily="2" charset="-78"/>
               </a:rPr>
               <a:t>أَوَّلًا، الدِّقَّةُ وَاحْتِرَامُ الوَقْتِ؛ بِالإِضَافَةِ إِلَى ذٰلِكَ، العَمَلُ الجَمَاعِيُّ وَاللُّطْفُ مَعَ الزُّمَلَاءِ.</a:t>
@@ -24496,6 +24674,7 @@
                   <a:srgbClr val="1B3B6F"/>
                 </a:solidFill>
                 <a:latin typeface="Amiri" pitchFamily="2" charset="-78"/>
+                <a:ea typeface="Amiri" pitchFamily="2" charset="-78"/>
                 <a:cs typeface="Amiri" pitchFamily="2" charset="-78"/>
               </a:rPr>
               <a:t>مَا الصِّفَاتُ الَّتِي يَحْتَاجُ إِلَيْهَا المُوَظَّفُ الجَيِّدُ؟</a:t>
@@ -24599,6 +24778,7 @@
                   <a:srgbClr val="1B3B6F"/>
                 </a:solidFill>
                 <a:latin typeface="Amiri" pitchFamily="2" charset="-78"/>
+                <a:ea typeface="Amiri" pitchFamily="2" charset="-78"/>
                 <a:cs typeface="Amiri" pitchFamily="2" charset="-78"/>
               </a:rPr>
               <a:t>تُسَاعِدُنِي فِي التَّوَاصُلِ مَعَ أَقَارِبِي وَفِي العَمَلِ؛ مَثَلًا، تَرْجَمْتُ لِسَائِحٍ عَرَبِيٍّ فِي المَحَطَّةِ الأُسْبُوعَ المَاضِيَ.</a:t>
@@ -24675,6 +24855,7 @@
                   <a:srgbClr val="1B3B6F"/>
                 </a:solidFill>
                 <a:latin typeface="Amiri" pitchFamily="2" charset="-78"/>
+                <a:ea typeface="Amiri" pitchFamily="2" charset="-78"/>
                 <a:cs typeface="Amiri" pitchFamily="2" charset="-78"/>
               </a:rPr>
               <a:t>كَيْفَ تُسَاعِدُكَ اللُّغَاتُ فِي حَيَاتِكَ؟</a:t>
@@ -24778,6 +24959,7 @@
                   <a:srgbClr val="1B3B6F"/>
                 </a:solidFill>
                 <a:latin typeface="Amiri" pitchFamily="2" charset="-78"/>
+                <a:ea typeface="Amiri" pitchFamily="2" charset="-78"/>
                 <a:cs typeface="Amiri" pitchFamily="2" charset="-78"/>
               </a:rPr>
               <a:t>فِي بَيْتِنَا نَتَعَشَّى مُتَأَخِّرِينَ مَعَ كُلِّ الأُسْرَةِ، بَيْنَمَا يَتَعَشَّى أَصْدِقَائِي الإِنْجْلِيزُ مُبَكِّرًا غَالِبًا؛ وَلٰكِنَّ الثَّقَافَتَيْنِ تُقَدِّرَانِ العَائِلَةَ.</a:t>
@@ -24854,6 +25036,7 @@
                   <a:srgbClr val="1B3B6F"/>
                 </a:solidFill>
                 <a:latin typeface="Amiri" pitchFamily="2" charset="-78"/>
+                <a:ea typeface="Amiri" pitchFamily="2" charset="-78"/>
                 <a:cs typeface="Amiri" pitchFamily="2" charset="-78"/>
               </a:rPr>
               <a:t>قَارِنْ بَيْنَ ثَقَافَتَيْنِ تَعْرِفُهُمَا.</a:t>
@@ -24957,6 +25140,7 @@
                   <a:srgbClr val="1B3B6F"/>
                 </a:solidFill>
                 <a:latin typeface="Amiri" pitchFamily="2" charset="-78"/>
+                <a:ea typeface="Amiri" pitchFamily="2" charset="-78"/>
                 <a:cs typeface="Amiri" pitchFamily="2" charset="-78"/>
               </a:rPr>
               <a:t>أَطْمَحُ إِلَى أَنْ أَعْمَلَ مُهَنْدِسًا فِي شَرِكَةٍ دُوَلِيَّةٍ، وَإِذَا نَجَحْتُ، فَسَأَعْمَلُ سَنَتَيْنِ فِي الخَلِيجِ.</a:t>
@@ -25033,6 +25217,7 @@
                   <a:srgbClr val="1B3B6F"/>
                 </a:solidFill>
                 <a:latin typeface="Amiri" pitchFamily="2" charset="-78"/>
+                <a:ea typeface="Amiri" pitchFamily="2" charset="-78"/>
                 <a:cs typeface="Amiri" pitchFamily="2" charset="-78"/>
               </a:rPr>
               <a:t>أَيْنَ تَرَى نَفْسَكَ بَعْدَ عَشْرِ سَنَوَاتٍ؟</a:t>
@@ -25242,6 +25427,7 @@
                   <a:srgbClr val="D4AF37"/>
                 </a:solidFill>
                 <a:latin typeface="Amiri" pitchFamily="2" charset="-78"/>
+                <a:ea typeface="Amiri" pitchFamily="2" charset="-78"/>
                 <a:cs typeface="Amiri" pitchFamily="2" charset="-78"/>
               </a:rPr>
               <a:t>م</a:t>
@@ -25562,6 +25748,7 @@
                   <a:srgbClr val="8A6D1E"/>
                 </a:solidFill>
                 <a:latin typeface="Amiri" pitchFamily="2" charset="-78"/>
+                <a:ea typeface="Amiri" pitchFamily="2" charset="-78"/>
                 <a:cs typeface="Amiri" pitchFamily="2" charset="-78"/>
               </a:rPr>
               <a:t>نَمُوذَجُ الإِجَابَةِ</a:t>
@@ -25804,6 +25991,7 @@
                   <a:srgbClr val="1B3B6F"/>
                 </a:solidFill>
                 <a:latin typeface="Amiri" pitchFamily="2" charset="-78"/>
+                <a:ea typeface="Amiri" pitchFamily="2" charset="-78"/>
                 <a:cs typeface="Amiri" pitchFamily="2" charset="-78"/>
               </a:rPr>
               <a:t>صَحِيحٌ أَنَّ الشَّهَادَاتِ تَفْتَحُ الأَبْوَابَ، غَيْرَ أَنَّ الخِبْرَةَ هِيَ الَّتِي تُبْقِيهَا مَفْتُوحَةً؛ لِذٰلِكَ أَحْرِصُ عَلَى الاثْنَتَيْنِ.</a:t>
@@ -25880,6 +26068,7 @@
                   <a:srgbClr val="1B3B6F"/>
                 </a:solidFill>
                 <a:latin typeface="Amiri" pitchFamily="2" charset="-78"/>
+                <a:ea typeface="Amiri" pitchFamily="2" charset="-78"/>
                 <a:cs typeface="Amiri" pitchFamily="2" charset="-78"/>
               </a:rPr>
               <a:t>هَلِ الشَّهَادَاتُ أَهَمُّ مِنَ الخِبْرَةِ؟</a:t>
@@ -25983,6 +26172,7 @@
                   <a:srgbClr val="1B3B6F"/>
                 </a:solidFill>
                 <a:latin typeface="Amiri" pitchFamily="2" charset="-78"/>
+                <a:ea typeface="Amiri" pitchFamily="2" charset="-78"/>
                 <a:cs typeface="Amiri" pitchFamily="2" charset="-78"/>
               </a:rPr>
               <a:t>أَرَى أَنَّ ذٰلِكَ ضَرُورِيٌّ، لِأَنَّ أَصْحَابَ العَمَلِ يَطْلُبُونَ اللُّغَاتِ، مِمَّا يَجْعَلُهَا مِفْتَاحًا لِلْوَظَائِفِ الدُّوَلِيَّةِ.</a:t>
@@ -26059,6 +26249,7 @@
                   <a:srgbClr val="1B3B6F"/>
                 </a:solidFill>
                 <a:latin typeface="Amiri" pitchFamily="2" charset="-78"/>
+                <a:ea typeface="Amiri" pitchFamily="2" charset="-78"/>
                 <a:cs typeface="Amiri" pitchFamily="2" charset="-78"/>
               </a:rPr>
               <a:t>هَلْ يَجِبُ أَنْ يَتَعَلَّمَ كُلُّ طَالِبٍ لُغَةً ثَانِيَةً؟</a:t>
@@ -26162,6 +26353,7 @@
                   <a:srgbClr val="1B3B6F"/>
                 </a:solidFill>
                 <a:latin typeface="Amiri" pitchFamily="2" charset="-78"/>
+                <a:ea typeface="Amiri" pitchFamily="2" charset="-78"/>
                 <a:cs typeface="Amiri" pitchFamily="2" charset="-78"/>
               </a:rPr>
               <a:t>كَانَ النَّاسُ يَعْمَلُونَ فِي مَدِينَتِهِمْ طُولَ حَيَاتِهِمْ، أَمَّا اليَوْمَ فَيَعْمَلُ كَثِيرُونَ مَعَ زُمَلَاءَ فِي قَارَّاتٍ أُخْرَى دُونَ أَنْ يُغَادِرُوا بُيُوتَهُمْ.</a:t>
@@ -26238,6 +26430,7 @@
                   <a:srgbClr val="1B3B6F"/>
                 </a:solidFill>
                 <a:latin typeface="Amiri" pitchFamily="2" charset="-78"/>
+                <a:ea typeface="Amiri" pitchFamily="2" charset="-78"/>
                 <a:cs typeface="Amiri" pitchFamily="2" charset="-78"/>
               </a:rPr>
               <a:t>كَيْفَ غَيَّرَتِ العَوْلَمَةُ عَالَمَ العَمَلِ؟</a:t>
@@ -26447,6 +26640,7 @@
                   <a:srgbClr val="D4AF37"/>
                 </a:solidFill>
                 <a:latin typeface="Amiri" pitchFamily="2" charset="-78"/>
+                <a:ea typeface="Amiri" pitchFamily="2" charset="-78"/>
                 <a:cs typeface="Amiri" pitchFamily="2" charset="-78"/>
               </a:rPr>
               <a:t>م</a:t>
@@ -26767,6 +26961,7 @@
                   <a:srgbClr val="8A6D1E"/>
                 </a:solidFill>
                 <a:latin typeface="Amiri" pitchFamily="2" charset="-78"/>
+                <a:ea typeface="Amiri" pitchFamily="2" charset="-78"/>
                 <a:cs typeface="Amiri" pitchFamily="2" charset="-78"/>
               </a:rPr>
               <a:t>نَمُوذَجُ الإِجَابَةِ</a:t>
@@ -27009,6 +27204,7 @@
                   <a:srgbClr val="1B3B6F"/>
                 </a:solidFill>
                 <a:latin typeface="Amiri" pitchFamily="2" charset="-78"/>
+                <a:ea typeface="Amiri" pitchFamily="2" charset="-78"/>
                 <a:cs typeface="Amiri" pitchFamily="2" charset="-78"/>
               </a:rPr>
               <a:t>لَيْسَ دَوْرُهَا تَعْلِيمَ المَعْلُومَاتِ فَقَطْ، بَلْ تَعْلِيمُنَا كَيْفَ نَعْمَلُ مَعَ مَنْ يَخْتَلِفُ عَنَّا، وَكَيْفَ نَتَعَلَّمُ طُولَ الحَيَاةِ.</a:t>
@@ -27085,6 +27281,7 @@
                   <a:srgbClr val="1B3B6F"/>
                 </a:solidFill>
                 <a:latin typeface="Amiri" pitchFamily="2" charset="-78"/>
+                <a:ea typeface="Amiri" pitchFamily="2" charset="-78"/>
                 <a:cs typeface="Amiri" pitchFamily="2" charset="-78"/>
               </a:rPr>
               <a:t>مَا دَوْرُ المَدْرَسَةِ فِي إِعْدَادِنَا لِلْعَالَمِ؟</a:t>
@@ -27188,6 +27385,7 @@
                   <a:srgbClr val="1B3B6F"/>
                 </a:solidFill>
                 <a:latin typeface="Amiri" pitchFamily="2" charset="-78"/>
+                <a:ea typeface="Amiri" pitchFamily="2" charset="-78"/>
                 <a:cs typeface="Amiri" pitchFamily="2" charset="-78"/>
               </a:rPr>
               <a:t>لَوْ عُرِضَتْ عَلَيَّ، لَقَبِلْتُهَا بِشَرْطِ أَنْ تَكُونَ لِمُدَّةٍ مَحْدُودَةٍ، لِأَنِّي أُرِيدُ أَنْ أَكْسِبَ الخِبْرَةَ ثُمَّ أَعُودَ لِأَخْدُمَ مُجْتَمَعِي.</a:t>
@@ -27267,6 +27465,7 @@
                   <a:srgbClr val="1B3B6F"/>
                 </a:solidFill>
                 <a:latin typeface="Amiri" pitchFamily="2" charset="-78"/>
+                <a:ea typeface="Amiri" pitchFamily="2" charset="-78"/>
                 <a:cs typeface="Amiri" pitchFamily="2" charset="-78"/>
               </a:rPr>
               <a:t>لَوْ عُرِضَتْ عَلَيْكَ وَظِيفَةٌ فِي بَلَدٍ بَعِيدٍ، هَلْ تَقْبَلُهَا؟</a:t>
@@ -27476,6 +27675,7 @@
                   <a:srgbClr val="D4AF37"/>
                 </a:solidFill>
                 <a:latin typeface="Amiri" pitchFamily="2" charset="-78"/>
+                <a:ea typeface="Amiri" pitchFamily="2" charset="-78"/>
                 <a:cs typeface="Amiri" pitchFamily="2" charset="-78"/>
               </a:rPr>
               <a:t>م</a:t>
@@ -27796,6 +27996,7 @@
                   <a:srgbClr val="8A6D1E"/>
                 </a:solidFill>
                 <a:latin typeface="Amiri" pitchFamily="2" charset="-78"/>
+                <a:ea typeface="Amiri" pitchFamily="2" charset="-78"/>
                 <a:cs typeface="Amiri" pitchFamily="2" charset="-78"/>
               </a:rPr>
               <a:t>قَيِّمْ عَمَلَكَ</a:t>
@@ -29040,6 +29241,7 @@
                   <a:srgbClr val="FFFFFF"/>
                 </a:solidFill>
                 <a:latin typeface="Amiri" pitchFamily="2" charset="-78"/>
+                <a:ea typeface="Amiri" pitchFamily="2" charset="-78"/>
                 <a:cs typeface="Amiri" pitchFamily="2" charset="-78"/>
               </a:rPr>
               <a:t>أَحْسَنْتُمْ! إِلَى اللِّقَاءِ</a:t>
@@ -29192,6 +29394,7 @@
                   <a:srgbClr val="D4AF37"/>
                 </a:solidFill>
                 <a:latin typeface="Amiri" pitchFamily="2" charset="-78"/>
+                <a:ea typeface="Amiri" pitchFamily="2" charset="-78"/>
                 <a:cs typeface="Amiri" pitchFamily="2" charset="-78"/>
               </a:rPr>
               <a:t>وَرْشَةُ الكِتَابَةِ</a:t>
@@ -29325,6 +29528,7 @@
                   <a:srgbClr val="D4AF37"/>
                 </a:solidFill>
                 <a:latin typeface="Amiri" pitchFamily="2" charset="-78"/>
+                <a:ea typeface="Amiri" pitchFamily="2" charset="-78"/>
                 <a:cs typeface="Amiri" pitchFamily="2" charset="-78"/>
               </a:rPr>
               <a:t>م</a:t>
@@ -29645,6 +29849,7 @@
                   <a:srgbClr val="8A6D1E"/>
                 </a:solidFill>
                 <a:latin typeface="Amiri" pitchFamily="2" charset="-78"/>
+                <a:ea typeface="Amiri" pitchFamily="2" charset="-78"/>
                 <a:cs typeface="Amiri" pitchFamily="2" charset="-78"/>
               </a:rPr>
               <a:t>خَرِيطَةُ الوَرْشَةِ</a:t>
@@ -29959,6 +30164,7 @@
                   <a:srgbClr val="1B3B6F"/>
                 </a:solidFill>
                 <a:latin typeface="Amiri" pitchFamily="2" charset="-78"/>
+                <a:ea typeface="Amiri" pitchFamily="2" charset="-78"/>
                 <a:cs typeface="Amiri" pitchFamily="2" charset="-78"/>
               </a:rPr>
               <a:t>كَيْفَ</a:t>
@@ -30235,6 +30441,7 @@
                   <a:srgbClr val="1E6B52"/>
                 </a:solidFill>
                 <a:latin typeface="Amiri" pitchFamily="2" charset="-78"/>
+                <a:ea typeface="Amiri" pitchFamily="2" charset="-78"/>
                 <a:cs typeface="Amiri" pitchFamily="2" charset="-78"/>
               </a:rPr>
               <a:t>تَمْثِيلُ الدَّوْرِ</a:t>
@@ -30511,6 +30718,7 @@
                   <a:srgbClr val="8A6D1E"/>
                 </a:solidFill>
                 <a:latin typeface="Amiri" pitchFamily="2" charset="-78"/>
+                <a:ea typeface="Amiri" pitchFamily="2" charset="-78"/>
                 <a:cs typeface="Amiri" pitchFamily="2" charset="-78"/>
               </a:rPr>
               <a:t>النَّمُوذَجُ</a:t>
@@ -30787,6 +30995,7 @@
                   <a:srgbClr val="1E6B52"/>
                 </a:solidFill>
                 <a:latin typeface="Amiri" pitchFamily="2" charset="-78"/>
+                <a:ea typeface="Amiri" pitchFamily="2" charset="-78"/>
                 <a:cs typeface="Amiri" pitchFamily="2" charset="-78"/>
               </a:rPr>
               <a:t>المُحَادَثَةُ</a:t>
@@ -31063,6 +31272,7 @@
                   <a:srgbClr val="8A6D1E"/>
                 </a:solidFill>
                 <a:latin typeface="Amiri" pitchFamily="2" charset="-78"/>
+                <a:ea typeface="Amiri" pitchFamily="2" charset="-78"/>
                 <a:cs typeface="Amiri" pitchFamily="2" charset="-78"/>
               </a:rPr>
               <a:t>قَيِّمْ</a:t>
@@ -31306,6 +31516,7 @@
                   <a:srgbClr val="D4AF37"/>
                 </a:solidFill>
                 <a:latin typeface="Amiri" pitchFamily="2" charset="-78"/>
+                <a:ea typeface="Amiri" pitchFamily="2" charset="-78"/>
                 <a:cs typeface="Amiri" pitchFamily="2" charset="-78"/>
               </a:rPr>
               <a:t>م</a:t>
@@ -31626,6 +31837,7 @@
                   <a:srgbClr val="8A6D1E"/>
                 </a:solidFill>
                 <a:latin typeface="Amiri" pitchFamily="2" charset="-78"/>
+                <a:ea typeface="Amiri" pitchFamily="2" charset="-78"/>
                 <a:cs typeface="Amiri" pitchFamily="2" charset="-78"/>
               </a:rPr>
               <a:t>امْتِحَانُ التَّحَدُّثِ</a:t>
@@ -32250,6 +32462,7 @@
                   <a:srgbClr val="1B3B6F"/>
                 </a:solidFill>
                 <a:latin typeface="Amiri" pitchFamily="2" charset="-78"/>
+                <a:ea typeface="Amiri" pitchFamily="2" charset="-78"/>
                 <a:cs typeface="Amiri" pitchFamily="2" charset="-78"/>
               </a:rPr>
               <a:t>عَفْوًا، هَلْ يُمْكِنُ أَنْ تُعِيدَ السُّؤَالَ؟</a:t>
@@ -32349,6 +32562,7 @@
                   <a:srgbClr val="1B3B6F"/>
                 </a:solidFill>
                 <a:latin typeface="Amiri" pitchFamily="2" charset="-78"/>
+                <a:ea typeface="Amiri" pitchFamily="2" charset="-78"/>
                 <a:cs typeface="Amiri" pitchFamily="2" charset="-78"/>
               </a:rPr>
               <a:t>لَحْظَةً، دَعْنِي أُفَكِّرُ …</a:t>
@@ -32448,6 +32662,7 @@
                   <a:srgbClr val="1B3B6F"/>
                 </a:solidFill>
                 <a:latin typeface="Amiri" pitchFamily="2" charset="-78"/>
+                <a:ea typeface="Amiri" pitchFamily="2" charset="-78"/>
                 <a:cs typeface="Amiri" pitchFamily="2" charset="-78"/>
               </a:rPr>
               <a:t>أَقْصِدُ …</a:t>
@@ -32619,6 +32834,7 @@
                   <a:srgbClr val="D4AF37"/>
                 </a:solidFill>
                 <a:latin typeface="Amiri" pitchFamily="2" charset="-78"/>
+                <a:ea typeface="Amiri" pitchFamily="2" charset="-78"/>
                 <a:cs typeface="Amiri" pitchFamily="2" charset="-78"/>
               </a:rPr>
               <a:t>م</a:t>
@@ -32939,6 +33155,7 @@
                   <a:srgbClr val="8A6D1E"/>
                 </a:solidFill>
                 <a:latin typeface="Amiri" pitchFamily="2" charset="-78"/>
+                <a:ea typeface="Amiri" pitchFamily="2" charset="-78"/>
                 <a:cs typeface="Amiri" pitchFamily="2" charset="-78"/>
               </a:rPr>
               <a:t>المِحْوَرَانِ الرَّابِعُ وَالخَامِسُ</a:t>
@@ -33242,6 +33459,7 @@
                   <a:srgbClr val="1B3B6F"/>
                 </a:solidFill>
                 <a:latin typeface="Amiri" pitchFamily="2" charset="-78"/>
+                <a:ea typeface="Amiri" pitchFamily="2" charset="-78"/>
                 <a:cs typeface="Amiri" pitchFamily="2" charset="-78"/>
               </a:rPr>
               <a:t>مَادَّتِي المُفَضَّلَةُ …</a:t>
@@ -33399,6 +33617,7 @@
                   <a:srgbClr val="1B3B6F"/>
                 </a:solidFill>
                 <a:latin typeface="Amiri" pitchFamily="2" charset="-78"/>
+                <a:ea typeface="Amiri" pitchFamily="2" charset="-78"/>
                 <a:cs typeface="Amiri" pitchFamily="2" charset="-78"/>
               </a:rPr>
               <a:t>أُفَضِّلُ … عَلَى …</a:t>
@@ -33502,6 +33721,7 @@
                   <a:srgbClr val="1B3B6F"/>
                 </a:solidFill>
                 <a:latin typeface="Amiri" pitchFamily="2" charset="-78"/>
+                <a:ea typeface="Amiri" pitchFamily="2" charset="-78"/>
                 <a:cs typeface="Amiri" pitchFamily="2" charset="-78"/>
               </a:rPr>
               <a:t>الجَدْوَلُ الدِّرَاسِيُّ</a:t>
@@ -33767,6 +33987,7 @@
                   <a:srgbClr val="1B3B6F"/>
                 </a:solidFill>
                 <a:latin typeface="Amiri" pitchFamily="2" charset="-78"/>
+                <a:ea typeface="Amiri" pitchFamily="2" charset="-78"/>
                 <a:cs typeface="Amiri" pitchFamily="2" charset="-78"/>
               </a:rPr>
               <a:t>أُرَاجِعُ · نَجَحْتُ فِي</a:t>
@@ -33924,6 +34145,7 @@
                   <a:srgbClr val="1B3B6F"/>
                 </a:solidFill>
                 <a:latin typeface="Amiri" pitchFamily="2" charset="-78"/>
+                <a:ea typeface="Amiri" pitchFamily="2" charset="-78"/>
                 <a:cs typeface="Amiri" pitchFamily="2" charset="-78"/>
               </a:rPr>
               <a:t>نَتَائِجُ</a:t>
@@ -34027,6 +34249,7 @@
                   <a:srgbClr val="1B3B6F"/>
                 </a:solidFill>
                 <a:latin typeface="Amiri" pitchFamily="2" charset="-78"/>
+                <a:ea typeface="Amiri" pitchFamily="2" charset="-78"/>
                 <a:cs typeface="Amiri" pitchFamily="2" charset="-78"/>
               </a:rPr>
               <a:t>امْتِحَانَاتٌ</a:t>
@@ -34292,6 +34515,7 @@
                   <a:srgbClr val="1B3B6F"/>
                 </a:solidFill>
                 <a:latin typeface="Amiri" pitchFamily="2" charset="-78"/>
+                <a:ea typeface="Amiri" pitchFamily="2" charset="-78"/>
                 <a:cs typeface="Amiri" pitchFamily="2" charset="-78"/>
               </a:rPr>
               <a:t>مُهَنْدِسٌ · مُهَنْدِسَةٌ</a:t>
@@ -34449,6 +34673,7 @@
                   <a:srgbClr val="1B3B6F"/>
                 </a:solidFill>
                 <a:latin typeface="Amiri" pitchFamily="2" charset="-78"/>
+                <a:ea typeface="Amiri" pitchFamily="2" charset="-78"/>
                 <a:cs typeface="Amiri" pitchFamily="2" charset="-78"/>
               </a:rPr>
               <a:t>مُعَلِّمُونَ</a:t>
@@ -34552,6 +34777,7 @@
                   <a:srgbClr val="1B3B6F"/>
                 </a:solidFill>
                 <a:latin typeface="Amiri" pitchFamily="2" charset="-78"/>
+                <a:ea typeface="Amiri" pitchFamily="2" charset="-78"/>
                 <a:cs typeface="Amiri" pitchFamily="2" charset="-78"/>
               </a:rPr>
               <a:t>طَبِيبَةٌ</a:t>
@@ -34817,6 +35043,7 @@
                   <a:srgbClr val="1B3B6F"/>
                 </a:solidFill>
                 <a:latin typeface="Amiri" pitchFamily="2" charset="-78"/>
+                <a:ea typeface="Amiri" pitchFamily="2" charset="-78"/>
                 <a:cs typeface="Amiri" pitchFamily="2" charset="-78"/>
               </a:rPr>
               <a:t>خِبْرَةُ عَمَلٍ</a:t>
@@ -34974,6 +35201,7 @@
                   <a:srgbClr val="1B3B6F"/>
                 </a:solidFill>
                 <a:latin typeface="Amiri" pitchFamily="2" charset="-78"/>
+                <a:ea typeface="Amiri" pitchFamily="2" charset="-78"/>
                 <a:cs typeface="Amiri" pitchFamily="2" charset="-78"/>
               </a:rPr>
               <a:t>رَاتِبٌ</a:t>
@@ -35077,6 +35305,7 @@
                   <a:srgbClr val="1B3B6F"/>
                 </a:solidFill>
                 <a:latin typeface="Amiri" pitchFamily="2" charset="-78"/>
+                <a:ea typeface="Amiri" pitchFamily="2" charset="-78"/>
                 <a:cs typeface="Amiri" pitchFamily="2" charset="-78"/>
               </a:rPr>
               <a:t>زُمَلَاءُ</a:t>
@@ -35342,6 +35571,7 @@
                   <a:srgbClr val="1B3B6F"/>
                 </a:solidFill>
                 <a:latin typeface="Amiri" pitchFamily="2" charset="-78"/>
+                <a:ea typeface="Amiri" pitchFamily="2" charset="-78"/>
                 <a:cs typeface="Amiri" pitchFamily="2" charset="-78"/>
               </a:rPr>
               <a:t>أَوَدُّ أَنْ أَتَقَدَّمَ لِوَظِيفَةٍ</a:t>
@@ -35499,6 +35729,7 @@
                   <a:srgbClr val="1B3B6F"/>
                 </a:solidFill>
                 <a:latin typeface="Amiri" pitchFamily="2" charset="-78"/>
+                <a:ea typeface="Amiri" pitchFamily="2" charset="-78"/>
                 <a:cs typeface="Amiri" pitchFamily="2" charset="-78"/>
               </a:rPr>
               <a:t>مُقَابَلَةٌ</a:t>
@@ -35602,6 +35833,7 @@
                   <a:srgbClr val="1B3B6F"/>
                 </a:solidFill>
                 <a:latin typeface="Amiri" pitchFamily="2" charset="-78"/>
+                <a:ea typeface="Amiri" pitchFamily="2" charset="-78"/>
                 <a:cs typeface="Amiri" pitchFamily="2" charset="-78"/>
               </a:rPr>
               <a:t>يَسُرُّنِي أَنْ</a:t>
@@ -35867,6 +36099,7 @@
                   <a:srgbClr val="1B3B6F"/>
                 </a:solidFill>
                 <a:latin typeface="Amiri" pitchFamily="2" charset="-78"/>
+                <a:ea typeface="Amiri" pitchFamily="2" charset="-78"/>
                 <a:cs typeface="Amiri" pitchFamily="2" charset="-78"/>
               </a:rPr>
               <a:t>أَطْمَحُ إِلَى أَنْ …</a:t>
@@ -36024,6 +36257,7 @@
                   <a:srgbClr val="1B3B6F"/>
                 </a:solidFill>
                 <a:latin typeface="Amiri" pitchFamily="2" charset="-78"/>
+                <a:ea typeface="Amiri" pitchFamily="2" charset="-78"/>
                 <a:cs typeface="Amiri" pitchFamily="2" charset="-78"/>
               </a:rPr>
               <a:t>الجَامِعَةُ</a:t>
@@ -36127,6 +36361,7 @@
                   <a:srgbClr val="1B3B6F"/>
                 </a:solidFill>
                 <a:latin typeface="Amiri" pitchFamily="2" charset="-78"/>
+                <a:ea typeface="Amiri" pitchFamily="2" charset="-78"/>
                 <a:cs typeface="Amiri" pitchFamily="2" charset="-78"/>
               </a:rPr>
               <a:t>خُطَّةٌ بَدِيلَةٌ</a:t>
@@ -36260,6 +36495,7 @@
                   <a:srgbClr val="D4AF37"/>
                 </a:solidFill>
                 <a:latin typeface="Amiri" pitchFamily="2" charset="-78"/>
+                <a:ea typeface="Amiri" pitchFamily="2" charset="-78"/>
                 <a:cs typeface="Amiri" pitchFamily="2" charset="-78"/>
               </a:rPr>
               <a:t>م</a:t>
@@ -36580,6 +36816,7 @@
                   <a:srgbClr val="8A6D1E"/>
                 </a:solidFill>
                 <a:latin typeface="Amiri" pitchFamily="2" charset="-78"/>
+                <a:ea typeface="Amiri" pitchFamily="2" charset="-78"/>
                 <a:cs typeface="Amiri" pitchFamily="2" charset="-78"/>
               </a:rPr>
               <a:t>بِنْيَاتٌ تَرْفَعُ الدَّرَجَةَ</a:t>
@@ -36883,6 +37120,7 @@
                   <a:srgbClr val="1B3B6F"/>
                 </a:solidFill>
                 <a:latin typeface="Amiri" pitchFamily="2" charset="-78"/>
+                <a:ea typeface="Amiri" pitchFamily="2" charset="-78"/>
                 <a:cs typeface="Amiri" pitchFamily="2" charset="-78"/>
               </a:rPr>
               <a:t>أَتَكَلَّمُ … بِطَلَاقَةٍ</a:t>
@@ -37040,6 +37278,7 @@
                   <a:srgbClr val="1B3B6F"/>
                 </a:solidFill>
                 <a:latin typeface="Amiri" pitchFamily="2" charset="-78"/>
+                <a:ea typeface="Amiri" pitchFamily="2" charset="-78"/>
                 <a:cs typeface="Amiri" pitchFamily="2" charset="-78"/>
               </a:rPr>
               <a:t>التَّرْجَمَةُ</a:t>
@@ -37143,6 +37382,7 @@
                   <a:srgbClr val="1B3B6F"/>
                 </a:solidFill>
                 <a:latin typeface="Amiri" pitchFamily="2" charset="-78"/>
+                <a:ea typeface="Amiri" pitchFamily="2" charset="-78"/>
                 <a:cs typeface="Amiri" pitchFamily="2" charset="-78"/>
               </a:rPr>
               <a:t>ثُنَائِيُّ اللُّغَةِ</a:t>
@@ -37408,6 +37648,7 @@
                   <a:srgbClr val="1B3B6F"/>
                 </a:solidFill>
                 <a:latin typeface="Amiri" pitchFamily="2" charset="-78"/>
+                <a:ea typeface="Amiri" pitchFamily="2" charset="-78"/>
                 <a:cs typeface="Amiri" pitchFamily="2" charset="-78"/>
               </a:rPr>
               <a:t>عَادَاتٌ · تَقَالِيدُ</a:t>
@@ -37565,6 +37806,7 @@
                   <a:srgbClr val="1B3B6F"/>
                 </a:solidFill>
                 <a:latin typeface="Amiri" pitchFamily="2" charset="-78"/>
+                <a:ea typeface="Amiri" pitchFamily="2" charset="-78"/>
                 <a:cs typeface="Amiri" pitchFamily="2" charset="-78"/>
               </a:rPr>
               <a:t>الهُوِيَّةُ</a:t>
@@ -37668,6 +37910,7 @@
                   <a:srgbClr val="1B3B6F"/>
                 </a:solidFill>
                 <a:latin typeface="Amiri" pitchFamily="2" charset="-78"/>
+                <a:ea typeface="Amiri" pitchFamily="2" charset="-78"/>
                 <a:cs typeface="Amiri" pitchFamily="2" charset="-78"/>
               </a:rPr>
               <a:t>الضِّيَافَةُ</a:t>
@@ -37933,6 +38176,7 @@
                   <a:srgbClr val="1B3B6F"/>
                 </a:solidFill>
                 <a:latin typeface="Amiri" pitchFamily="2" charset="-78"/>
+                <a:ea typeface="Amiri" pitchFamily="2" charset="-78"/>
                 <a:cs typeface="Amiri" pitchFamily="2" charset="-78"/>
               </a:rPr>
               <a:t>تَبَادُلٌ ثَقَافِيٌّ</a:t>
@@ -38090,6 +38334,7 @@
                   <a:srgbClr val="1B3B6F"/>
                 </a:solidFill>
                 <a:latin typeface="Amiri" pitchFamily="2" charset="-78"/>
+                <a:ea typeface="Amiri" pitchFamily="2" charset="-78"/>
                 <a:cs typeface="Amiri" pitchFamily="2" charset="-78"/>
               </a:rPr>
               <a:t>فِي الخَارِجِ</a:t>
@@ -38193,6 +38438,7 @@
                   <a:srgbClr val="1B3B6F"/>
                 </a:solidFill>
                 <a:latin typeface="Amiri" pitchFamily="2" charset="-78"/>
+                <a:ea typeface="Amiri" pitchFamily="2" charset="-78"/>
                 <a:cs typeface="Amiri" pitchFamily="2" charset="-78"/>
               </a:rPr>
               <a:t>العَائِلَةُ المُضِيفَةُ</a:t>
@@ -38458,6 +38704,7 @@
                   <a:srgbClr val="1B3B6F"/>
                 </a:solidFill>
                 <a:latin typeface="Amiri" pitchFamily="2" charset="-78"/>
+                <a:ea typeface="Amiri" pitchFamily="2" charset="-78"/>
                 <a:cs typeface="Amiri" pitchFamily="2" charset="-78"/>
               </a:rPr>
               <a:t>بَيْنَمَا · أَمَّا … فَإِنَّ</a:t>
@@ -38615,6 +38862,7 @@
                   <a:srgbClr val="1B3B6F"/>
                 </a:solidFill>
                 <a:latin typeface="Amiri" pitchFamily="2" charset="-78"/>
+                <a:ea typeface="Amiri" pitchFamily="2" charset="-78"/>
                 <a:cs typeface="Amiri" pitchFamily="2" charset="-78"/>
               </a:rPr>
               <a:t>غَالِبًا</a:t>
@@ -38718,6 +38966,7 @@
                   <a:srgbClr val="1B3B6F"/>
                 </a:solidFill>
                 <a:latin typeface="Amiri" pitchFamily="2" charset="-78"/>
+                <a:ea typeface="Amiri" pitchFamily="2" charset="-78"/>
                 <a:cs typeface="Amiri" pitchFamily="2" charset="-78"/>
               </a:rPr>
               <a:t>مُخْتَلِفٌ لَا أَفْضَلُ</a:t>
@@ -38983,6 +39232,7 @@
                   <a:srgbClr val="1B3B6F"/>
                 </a:solidFill>
                 <a:latin typeface="Amiri" pitchFamily="2" charset="-78"/>
+                <a:ea typeface="Amiri" pitchFamily="2" charset="-78"/>
                 <a:cs typeface="Amiri" pitchFamily="2" charset="-78"/>
               </a:rPr>
               <a:t>إِذَا … فَسَأُسَافِرُ</a:t>
@@ -39140,6 +39390,7 @@
                   <a:srgbClr val="1B3B6F"/>
                 </a:solidFill>
                 <a:latin typeface="Amiri" pitchFamily="2" charset="-78"/>
+                <a:ea typeface="Amiri" pitchFamily="2" charset="-78"/>
                 <a:cs typeface="Amiri" pitchFamily="2" charset="-78"/>
               </a:rPr>
               <a:t>دُوَلِيٌّ</a:t>
@@ -39243,6 +39494,7 @@
                   <a:srgbClr val="1B3B6F"/>
                 </a:solidFill>
                 <a:latin typeface="Amiri" pitchFamily="2" charset="-78"/>
+                <a:ea typeface="Amiri" pitchFamily="2" charset="-78"/>
                 <a:cs typeface="Amiri" pitchFamily="2" charset="-78"/>
               </a:rPr>
               <a:t>عَالَمِيٌّ</a:t>
@@ -39508,6 +39760,7 @@
                   <a:srgbClr val="1B3B6F"/>
                 </a:solidFill>
                 <a:latin typeface="Amiri" pitchFamily="2" charset="-78"/>
+                <a:ea typeface="Amiri" pitchFamily="2" charset="-78"/>
                 <a:cs typeface="Amiri" pitchFamily="2" charset="-78"/>
               </a:rPr>
               <a:t>صَحِيحٌ أَنَّ … غَيْرَ أَنَّ …</a:t>
@@ -39665,6 +39918,7 @@
                   <a:srgbClr val="1B3B6F"/>
                 </a:solidFill>
                 <a:latin typeface="Amiri" pitchFamily="2" charset="-78"/>
+                <a:ea typeface="Amiri" pitchFamily="2" charset="-78"/>
                 <a:cs typeface="Amiri" pitchFamily="2" charset="-78"/>
               </a:rPr>
               <a:t>لَيْسَ … بَلْ</a:t>
@@ -39768,6 +40022,7 @@
                   <a:srgbClr val="1B3B6F"/>
                 </a:solidFill>
                 <a:latin typeface="Amiri" pitchFamily="2" charset="-78"/>
+                <a:ea typeface="Amiri" pitchFamily="2" charset="-78"/>
                 <a:cs typeface="Amiri" pitchFamily="2" charset="-78"/>
               </a:rPr>
               <a:t>لَوْ كُنْتُ … لَاخْتَرْتُ</a:t>
@@ -39901,6 +40156,7 @@
                   <a:srgbClr val="D4AF37"/>
                 </a:solidFill>
                 <a:latin typeface="Amiri" pitchFamily="2" charset="-78"/>
+                <a:ea typeface="Amiri" pitchFamily="2" charset="-78"/>
                 <a:cs typeface="Amiri" pitchFamily="2" charset="-78"/>
               </a:rPr>
               <a:t>م</a:t>
@@ -40221,6 +40477,7 @@
                   <a:srgbClr val="8A6D1E"/>
                 </a:solidFill>
                 <a:latin typeface="Amiri" pitchFamily="2" charset="-78"/>
+                <a:ea typeface="Amiri" pitchFamily="2" charset="-78"/>
                 <a:cs typeface="Amiri" pitchFamily="2" charset="-78"/>
               </a:rPr>
               <a:t>فِي الغُرَفِ</a:t>
@@ -41397,6 +41654,7 @@
                   <a:srgbClr val="1B3B6F"/>
                 </a:solidFill>
                 <a:latin typeface="Amiri" pitchFamily="2" charset="-78"/>
+                <a:ea typeface="Amiri" pitchFamily="2" charset="-78"/>
                 <a:cs typeface="Amiri" pitchFamily="2" charset="-78"/>
               </a:rPr>
               <a:t>دَوْرُكَ!</a:t>
@@ -41473,6 +41731,7 @@
                   <a:srgbClr val="1B3B6F"/>
                 </a:solidFill>
                 <a:latin typeface="Amiri" pitchFamily="2" charset="-78"/>
+                <a:ea typeface="Amiri" pitchFamily="2" charset="-78"/>
                 <a:cs typeface="Amiri" pitchFamily="2" charset="-78"/>
               </a:rPr>
               <a:t>أَحْسَنْتَ! / أَحْسَنْتِ!</a:t>
@@ -41549,6 +41808,7 @@
                   <a:srgbClr val="1B3B6F"/>
                 </a:solidFill>
                 <a:latin typeface="Amiri" pitchFamily="2" charset="-78"/>
+                <a:ea typeface="Amiri" pitchFamily="2" charset="-78"/>
                 <a:cs typeface="Amiri" pitchFamily="2" charset="-78"/>
               </a:rPr>
               <a:t>تَكَلَّمْ أَكْثَرَ، مِنْ فَضْلِكَ</a:t>
@@ -41625,6 +41885,7 @@
                   <a:srgbClr val="1B3B6F"/>
                 </a:solidFill>
                 <a:latin typeface="Amiri" pitchFamily="2" charset="-78"/>
+                <a:ea typeface="Amiri" pitchFamily="2" charset="-78"/>
                 <a:cs typeface="Amiri" pitchFamily="2" charset="-78"/>
               </a:rPr>
               <a:t>لِمَاذَا؟</a:t>
@@ -41796,6 +42057,7 @@
                   <a:srgbClr val="D4AF37"/>
                 </a:solidFill>
                 <a:latin typeface="Amiri" pitchFamily="2" charset="-78"/>
+                <a:ea typeface="Amiri" pitchFamily="2" charset="-78"/>
                 <a:cs typeface="Amiri" pitchFamily="2" charset="-78"/>
               </a:rPr>
               <a:t>م</a:t>
@@ -42116,6 +42378,7 @@
                   <a:srgbClr val="8A6D1E"/>
                 </a:solidFill>
                 <a:latin typeface="Amiri" pitchFamily="2" charset="-78"/>
+                <a:ea typeface="Amiri" pitchFamily="2" charset="-78"/>
                 <a:cs typeface="Amiri" pitchFamily="2" charset="-78"/>
               </a:rPr>
               <a:t>مَعَ المُرْشِدَةِ المِهْنِيَّةِ</a:t>
@@ -42396,6 +42659,7 @@
                   <a:srgbClr val="1B3B6F"/>
                 </a:solidFill>
                 <a:latin typeface="Amiri" pitchFamily="2" charset="-78"/>
+                <a:ea typeface="Amiri" pitchFamily="2" charset="-78"/>
                 <a:cs typeface="Amiri" pitchFamily="2" charset="-78"/>
               </a:rPr>
               <a:t>أَدْرُسُ … وَ… وَ…</a:t>
@@ -42472,6 +42736,7 @@
                   <a:srgbClr val="1B3B6F"/>
                 </a:solidFill>
                 <a:latin typeface="Amiri" pitchFamily="2" charset="-78"/>
+                <a:ea typeface="Amiri" pitchFamily="2" charset="-78"/>
                 <a:cs typeface="Amiri" pitchFamily="2" charset="-78"/>
               </a:rPr>
               <a:t>أَهْلًا! مَا المَوَادُّ الَّتِي تَدْرُسِينَهَا؟</a:t>
@@ -42640,6 +42905,7 @@
                   <a:srgbClr val="1B3B6F"/>
                 </a:solidFill>
                 <a:latin typeface="Amiri" pitchFamily="2" charset="-78"/>
+                <a:ea typeface="Amiri" pitchFamily="2" charset="-78"/>
                 <a:cs typeface="Amiri" pitchFamily="2" charset="-78"/>
               </a:rPr>
               <a:t>مَادَّتِي المُفَضَّلَةُ … لِأَنَّ …</a:t>
@@ -42716,6 +42982,7 @@
                   <a:srgbClr val="1B3B6F"/>
                 </a:solidFill>
                 <a:latin typeface="Amiri" pitchFamily="2" charset="-78"/>
+                <a:ea typeface="Amiri" pitchFamily="2" charset="-78"/>
                 <a:cs typeface="Amiri" pitchFamily="2" charset="-78"/>
               </a:rPr>
               <a:t>وَمَا مَادَّتُكِ المُفَضَّلَةُ؟</a:t>
@@ -42884,6 +43151,7 @@
                   <a:srgbClr val="1B3B6F"/>
                 </a:solidFill>
                 <a:latin typeface="Amiri" pitchFamily="2" charset="-78"/>
+                <a:ea typeface="Amiri" pitchFamily="2" charset="-78"/>
                 <a:cs typeface="Amiri" pitchFamily="2" charset="-78"/>
               </a:rPr>
               <a:t>أُرِيدُ أَنْ أَكُونَ …</a:t>
@@ -42960,6 +43228,7 @@
                   <a:srgbClr val="1B3B6F"/>
                 </a:solidFill>
                 <a:latin typeface="Amiri" pitchFamily="2" charset="-78"/>
+                <a:ea typeface="Amiri" pitchFamily="2" charset="-78"/>
                 <a:cs typeface="Amiri" pitchFamily="2" charset="-78"/>
               </a:rPr>
               <a:t>أَيَّ وَظِيفَةٍ تُرِيدِينَ فِي المُسْتَقْبَلِ؟</a:t>
@@ -43128,6 +43397,7 @@
                   <a:srgbClr val="1B3B6F"/>
                 </a:solidFill>
                 <a:latin typeface="Amiri" pitchFamily="2" charset="-78"/>
+                <a:ea typeface="Amiri" pitchFamily="2" charset="-78"/>
                 <a:cs typeface="Amiri" pitchFamily="2" charset="-78"/>
               </a:rPr>
               <a:t>هَلْ أَسْتَطِيعُ أَنْ …؟</a:t>
@@ -43204,6 +43474,7 @@
                   <a:srgbClr val="1B3B6F"/>
                 </a:solidFill>
                 <a:latin typeface="Amiri" pitchFamily="2" charset="-78"/>
+                <a:ea typeface="Amiri" pitchFamily="2" charset="-78"/>
                 <a:cs typeface="Amiri" pitchFamily="2" charset="-78"/>
               </a:rPr>
               <a:t>فِكْرَةٌ جَيِّدَةٌ.</a:t>
@@ -43372,6 +43643,7 @@
                   <a:srgbClr val="1B3B6F"/>
                 </a:solidFill>
                 <a:latin typeface="Amiri" pitchFamily="2" charset="-78"/>
+                <a:ea typeface="Amiri" pitchFamily="2" charset="-78"/>
                 <a:cs typeface="Amiri" pitchFamily="2" charset="-78"/>
               </a:rPr>
               <a:t>أَتَكَلَّمُ …</a:t>
@@ -43448,6 +43720,7 @@
                   <a:srgbClr val="1B3B6F"/>
                 </a:solidFill>
                 <a:latin typeface="Amiri" pitchFamily="2" charset="-78"/>
+                <a:ea typeface="Amiri" pitchFamily="2" charset="-78"/>
                 <a:cs typeface="Amiri" pitchFamily="2" charset="-78"/>
               </a:rPr>
               <a:t>نَعَمْ. كَمْ لُغَةً تَتَكَلَّمِينَ؟</a:t>
@@ -43722,6 +43995,7 @@
                   <a:srgbClr val="D4AF37"/>
                 </a:solidFill>
                 <a:latin typeface="Amiri" pitchFamily="2" charset="-78"/>
+                <a:ea typeface="Amiri" pitchFamily="2" charset="-78"/>
                 <a:cs typeface="Amiri" pitchFamily="2" charset="-78"/>
               </a:rPr>
               <a:t>م</a:t>
@@ -44042,6 +44316,7 @@
                   <a:srgbClr val="8A6D1E"/>
                 </a:solidFill>
                 <a:latin typeface="Amiri" pitchFamily="2" charset="-78"/>
+                <a:ea typeface="Amiri" pitchFamily="2" charset="-78"/>
                 <a:cs typeface="Amiri" pitchFamily="2" charset="-78"/>
               </a:rPr>
               <a:t>وَظِيفَةٌ صَيْفِيَّةٌ فِي فُنْدُقٍ دُوَلِيٍّ</a:t>
@@ -44322,6 +44597,7 @@
                   <a:srgbClr val="1B3B6F"/>
                 </a:solidFill>
                 <a:latin typeface="Amiri" pitchFamily="2" charset="-78"/>
+                <a:ea typeface="Amiri" pitchFamily="2" charset="-78"/>
                 <a:cs typeface="Amiri" pitchFamily="2" charset="-78"/>
               </a:rPr>
               <a:t>صَبَاحَ النُّورِ. أَوَدُّ أَنْ أَتَقَدَّمَ لِوَظِيفَةِ …</a:t>
@@ -44398,6 +44674,7 @@
                   <a:srgbClr val="1B3B6F"/>
                 </a:solidFill>
                 <a:latin typeface="Amiri" pitchFamily="2" charset="-78"/>
+                <a:ea typeface="Amiri" pitchFamily="2" charset="-78"/>
                 <a:cs typeface="Amiri" pitchFamily="2" charset="-78"/>
               </a:rPr>
               <a:t>صَبَاحَ الخَيْرِ، تَفَضَّلِي بِالجُلُوسِ.</a:t>
@@ -44566,6 +44843,7 @@
                   <a:srgbClr val="1B3B6F"/>
                 </a:solidFill>
                 <a:latin typeface="Amiri" pitchFamily="2" charset="-78"/>
+                <a:ea typeface="Amiri" pitchFamily="2" charset="-78"/>
                 <a:cs typeface="Amiri" pitchFamily="2" charset="-78"/>
               </a:rPr>
               <a:t>أَتَكَلَّمُ … بِطَلَاقَةٍ، وَ… قَلِيلًا</a:t>
@@ -44642,6 +44920,7 @@
                   <a:srgbClr val="1B3B6F"/>
                 </a:solidFill>
                 <a:latin typeface="Amiri" pitchFamily="2" charset="-78"/>
+                <a:ea typeface="Amiri" pitchFamily="2" charset="-78"/>
                 <a:cs typeface="Amiri" pitchFamily="2" charset="-78"/>
               </a:rPr>
               <a:t>مَا اللُّغَاتُ الَّتِي تَتَكَلَّمِينَهَا؟</a:t>
@@ -44810,6 +45089,7 @@
                   <a:srgbClr val="1B3B6F"/>
                 </a:solidFill>
                 <a:latin typeface="Amiri" pitchFamily="2" charset="-78"/>
+                <a:ea typeface="Amiri" pitchFamily="2" charset="-78"/>
                 <a:cs typeface="Amiri" pitchFamily="2" charset="-78"/>
               </a:rPr>
               <a:t>لِأَنِّي … وَ… ؛ مَثَلًا …</a:t>
@@ -44886,6 +45166,7 @@
                   <a:srgbClr val="1B3B6F"/>
                 </a:solidFill>
                 <a:latin typeface="Amiri" pitchFamily="2" charset="-78"/>
+                <a:ea typeface="Amiri" pitchFamily="2" charset="-78"/>
                 <a:cs typeface="Amiri" pitchFamily="2" charset="-78"/>
               </a:rPr>
               <a:t>لِمَاذَا تُنَاسِبُكِ هٰذِهِ الوَظِيفَةُ؟</a:t>
@@ -44989,6 +45270,7 @@
                   <a:srgbClr val="1B3B6F"/>
                 </a:solidFill>
                 <a:latin typeface="Amiri" pitchFamily="2" charset="-78"/>
+                <a:ea typeface="Amiri" pitchFamily="2" charset="-78"/>
                 <a:cs typeface="Amiri" pitchFamily="2" charset="-78"/>
               </a:rPr>
               <a:t>كَمْ سَاعَةً …؟ وَكَمِ …؟</a:t>
@@ -45065,6 +45347,7 @@
                   <a:srgbClr val="1B3B6F"/>
                 </a:solidFill>
                 <a:latin typeface="Amiri" pitchFamily="2" charset="-78"/>
+                <a:ea typeface="Amiri" pitchFamily="2" charset="-78"/>
                 <a:cs typeface="Amiri" pitchFamily="2" charset="-78"/>
               </a:rPr>
               <a:t>العَمَلُ مِنَ الأَحَدِ إِلَى الخَمِيسِ.</a:t>
@@ -45168,6 +45451,7 @@
                   <a:srgbClr val="1B3B6F"/>
                 </a:solidFill>
                 <a:latin typeface="Amiri" pitchFamily="2" charset="-78"/>
+                <a:ea typeface="Amiri" pitchFamily="2" charset="-78"/>
                 <a:cs typeface="Amiri" pitchFamily="2" charset="-78"/>
               </a:rPr>
               <a:t>نَعَمْ، زُرْتُ … ، وَأَعْجَبَنِي …</a:t>
@@ -45244,6 +45528,7 @@
                   <a:srgbClr val="1B3B6F"/>
                 </a:solidFill>
                 <a:latin typeface="Amiri" pitchFamily="2" charset="-78"/>
+                <a:ea typeface="Amiri" pitchFamily="2" charset="-78"/>
                 <a:cs typeface="Amiri" pitchFamily="2" charset="-78"/>
               </a:rPr>
               <a:t>سِتُّ سَاعَاتٍ. هَلْ زُرْتِ بَلَدًا عَرَبِيًّا؟</a:t>
@@ -45418,13 +45703,9 @@
     <a:fontScheme name="Office">
       <a:majorFont>
         <a:latin typeface="Calibri Light" panose="020F0302020204030204"/>
-        <a:ea typeface=""/>
-        <a:cs typeface=""/>
-        <a:font script="Jpan" typeface="游ゴシック Light"/>
-        <a:font script="Hang" typeface="맑은 고딕"/>
-        <a:font script="Hans" typeface="等线 Light"/>
-        <a:font script="Hant" typeface="新細明體"/>
-        <a:font script="Arab" typeface="Times New Roman"/>
+        <a:ea typeface="Amiri" pitchFamily="2" charset="-78"/>
+        <a:cs typeface="Amiri" pitchFamily="2" charset="-78"/>
+        <a:font script="Arab" typeface="Amiri"/>
         <a:font script="Hebr" typeface="Times New Roman"/>
         <a:font script="Thai" typeface="Angsana New"/>
         <a:font script="Ethi" typeface="Nyala"/>
@@ -45470,13 +45751,9 @@
       </a:majorFont>
       <a:minorFont>
         <a:latin typeface="Calibri" panose="020F0502020204030204"/>
-        <a:ea typeface=""/>
-        <a:cs typeface=""/>
-        <a:font script="Jpan" typeface="游ゴシック"/>
-        <a:font script="Hang" typeface="맑은 고딕"/>
-        <a:font script="Hans" typeface="等线"/>
-        <a:font script="Hant" typeface="新細明體"/>
-        <a:font script="Arab" typeface="Arial"/>
+        <a:ea typeface="Amiri" pitchFamily="2" charset="-78"/>
+        <a:cs typeface="Amiri" pitchFamily="2" charset="-78"/>
+        <a:font script="Arab" typeface="Amiri"/>
         <a:font script="Hebr" typeface="Arial"/>
         <a:font script="Thai" typeface="Cordia New"/>
         <a:font script="Ethi" typeface="Nyala"/>
